--- a/Week-1/Eigenfaces_PCA_Bilingual_Lecture.pptx
+++ b/Week-1/Eigenfaces_PCA_Bilingual_Lecture.pptx
@@ -17,7 +17,7 @@
     <p:sldId id="262" r:id="rId8"/>
     <p:sldId id="263" r:id="rId9"/>
     <p:sldId id="264" r:id="rId10"/>
-    <p:sldId id="265" r:id="rId11"/>
+    <p:sldId id="297" r:id="rId11"/>
     <p:sldId id="266" r:id="rId12"/>
     <p:sldId id="267" r:id="rId13"/>
     <p:sldId id="268" r:id="rId14"/>
@@ -426,7 +426,7 @@
           <a:p>
             <a:fld id="{F7021451-1387-4CA6-816F-3879F97B5CBC}" type="slidenum">
               <a:rPr lang="en-US"/>
-              <a:t>10</a:t>
+              <a:t>11</a:t>
             </a:fld>
             <a:endParaRPr lang="en-US"/>
           </a:p>
@@ -510,7 +510,7 @@
           <a:p>
             <a:fld id="{F7021451-1387-4CA6-816F-3879F97B5CBC}" type="slidenum">
               <a:rPr lang="en-US"/>
-              <a:t>11</a:t>
+              <a:t>12</a:t>
             </a:fld>
             <a:endParaRPr lang="en-US"/>
           </a:p>
@@ -594,7 +594,7 @@
           <a:p>
             <a:fld id="{F7021451-1387-4CA6-816F-3879F97B5CBC}" type="slidenum">
               <a:rPr lang="en-US"/>
-              <a:t>12</a:t>
+              <a:t>13</a:t>
             </a:fld>
             <a:endParaRPr lang="en-US"/>
           </a:p>
@@ -678,7 +678,7 @@
           <a:p>
             <a:fld id="{F7021451-1387-4CA6-816F-3879F97B5CBC}" type="slidenum">
               <a:rPr lang="en-US"/>
-              <a:t>13</a:t>
+              <a:t>14</a:t>
             </a:fld>
             <a:endParaRPr lang="en-US"/>
           </a:p>
@@ -762,7 +762,7 @@
           <a:p>
             <a:fld id="{F7021451-1387-4CA6-816F-3879F97B5CBC}" type="slidenum">
               <a:rPr lang="en-US"/>
-              <a:t>14</a:t>
+              <a:t>15</a:t>
             </a:fld>
             <a:endParaRPr lang="en-US"/>
           </a:p>
@@ -846,7 +846,7 @@
           <a:p>
             <a:fld id="{F7021451-1387-4CA6-816F-3879F97B5CBC}" type="slidenum">
               <a:rPr lang="en-US"/>
-              <a:t>15</a:t>
+              <a:t>16</a:t>
             </a:fld>
             <a:endParaRPr lang="en-US"/>
           </a:p>
@@ -930,7 +930,7 @@
           <a:p>
             <a:fld id="{F7021451-1387-4CA6-816F-3879F97B5CBC}" type="slidenum">
               <a:rPr lang="en-US"/>
-              <a:t>16</a:t>
+              <a:t>17</a:t>
             </a:fld>
             <a:endParaRPr lang="en-US"/>
           </a:p>
@@ -1014,7 +1014,7 @@
           <a:p>
             <a:fld id="{F7021451-1387-4CA6-816F-3879F97B5CBC}" type="slidenum">
               <a:rPr lang="en-US"/>
-              <a:t>17</a:t>
+              <a:t>18</a:t>
             </a:fld>
             <a:endParaRPr lang="en-US"/>
           </a:p>
@@ -1098,7 +1098,7 @@
           <a:p>
             <a:fld id="{F7021451-1387-4CA6-816F-3879F97B5CBC}" type="slidenum">
               <a:rPr lang="en-US"/>
-              <a:t>18</a:t>
+              <a:t>19</a:t>
             </a:fld>
             <a:endParaRPr lang="en-US"/>
           </a:p>
@@ -1182,7 +1182,7 @@
           <a:p>
             <a:fld id="{F7021451-1387-4CA6-816F-3879F97B5CBC}" type="slidenum">
               <a:rPr lang="en-US"/>
-              <a:t>19</a:t>
+              <a:t>20</a:t>
             </a:fld>
             <a:endParaRPr lang="en-US"/>
           </a:p>
@@ -1350,7 +1350,7 @@
           <a:p>
             <a:fld id="{F7021451-1387-4CA6-816F-3879F97B5CBC}" type="slidenum">
               <a:rPr lang="en-US"/>
-              <a:t>20</a:t>
+              <a:t>21</a:t>
             </a:fld>
             <a:endParaRPr lang="en-US"/>
           </a:p>
@@ -1434,7 +1434,7 @@
           <a:p>
             <a:fld id="{F7021451-1387-4CA6-816F-3879F97B5CBC}" type="slidenum">
               <a:rPr lang="en-US"/>
-              <a:t>21</a:t>
+              <a:t>22</a:t>
             </a:fld>
             <a:endParaRPr lang="en-US"/>
           </a:p>
@@ -1518,7 +1518,7 @@
           <a:p>
             <a:fld id="{F7021451-1387-4CA6-816F-3879F97B5CBC}" type="slidenum">
               <a:rPr lang="en-US"/>
-              <a:t>22</a:t>
+              <a:t>23</a:t>
             </a:fld>
             <a:endParaRPr lang="en-US"/>
           </a:p>
@@ -1602,7 +1602,7 @@
           <a:p>
             <a:fld id="{F7021451-1387-4CA6-816F-3879F97B5CBC}" type="slidenum">
               <a:rPr lang="en-US"/>
-              <a:t>23</a:t>
+              <a:t>24</a:t>
             </a:fld>
             <a:endParaRPr lang="en-US"/>
           </a:p>
@@ -1686,7 +1686,7 @@
           <a:p>
             <a:fld id="{F7021451-1387-4CA6-816F-3879F97B5CBC}" type="slidenum">
               <a:rPr lang="en-US"/>
-              <a:t>24</a:t>
+              <a:t>25</a:t>
             </a:fld>
             <a:endParaRPr lang="en-US"/>
           </a:p>
@@ -1770,7 +1770,7 @@
           <a:p>
             <a:fld id="{F7021451-1387-4CA6-816F-3879F97B5CBC}" type="slidenum">
               <a:rPr lang="en-US"/>
-              <a:t>25</a:t>
+              <a:t>26</a:t>
             </a:fld>
             <a:endParaRPr lang="en-US"/>
           </a:p>
@@ -1854,7 +1854,7 @@
           <a:p>
             <a:fld id="{F7021451-1387-4CA6-816F-3879F97B5CBC}" type="slidenum">
               <a:rPr lang="en-US"/>
-              <a:t>26</a:t>
+              <a:t>27</a:t>
             </a:fld>
             <a:endParaRPr lang="en-US"/>
           </a:p>
@@ -1938,7 +1938,7 @@
           <a:p>
             <a:fld id="{F7021451-1387-4CA6-816F-3879F97B5CBC}" type="slidenum">
               <a:rPr lang="en-US"/>
-              <a:t>27</a:t>
+              <a:t>28</a:t>
             </a:fld>
             <a:endParaRPr lang="en-US"/>
           </a:p>
@@ -2022,7 +2022,7 @@
           <a:p>
             <a:fld id="{F7021451-1387-4CA6-816F-3879F97B5CBC}" type="slidenum">
               <a:rPr lang="en-US"/>
-              <a:t>28</a:t>
+              <a:t>29</a:t>
             </a:fld>
             <a:endParaRPr lang="en-US"/>
           </a:p>
@@ -2106,7 +2106,7 @@
           <a:p>
             <a:fld id="{F7021451-1387-4CA6-816F-3879F97B5CBC}" type="slidenum">
               <a:rPr lang="en-US"/>
-              <a:t>29</a:t>
+              <a:t>30</a:t>
             </a:fld>
             <a:endParaRPr lang="en-US"/>
           </a:p>
@@ -2274,7 +2274,7 @@
           <a:p>
             <a:fld id="{F7021451-1387-4CA6-816F-3879F97B5CBC}" type="slidenum">
               <a:rPr lang="en-US"/>
-              <a:t>30</a:t>
+              <a:t>31</a:t>
             </a:fld>
             <a:endParaRPr lang="en-US"/>
           </a:p>
@@ -2358,7 +2358,7 @@
           <a:p>
             <a:fld id="{F7021451-1387-4CA6-816F-3879F97B5CBC}" type="slidenum">
               <a:rPr lang="en-US"/>
-              <a:t>31</a:t>
+              <a:t>32</a:t>
             </a:fld>
             <a:endParaRPr lang="en-US"/>
           </a:p>
@@ -2442,7 +2442,7 @@
           <a:p>
             <a:fld id="{F7021451-1387-4CA6-816F-3879F97B5CBC}" type="slidenum">
               <a:rPr lang="en-US"/>
-              <a:t>32</a:t>
+              <a:t>33</a:t>
             </a:fld>
             <a:endParaRPr lang="en-US"/>
           </a:p>
@@ -2526,7 +2526,7 @@
           <a:p>
             <a:fld id="{F7021451-1387-4CA6-816F-3879F97B5CBC}" type="slidenum">
               <a:rPr lang="en-US"/>
-              <a:t>33</a:t>
+              <a:t>34</a:t>
             </a:fld>
             <a:endParaRPr lang="en-US"/>
           </a:p>
@@ -2610,7 +2610,7 @@
           <a:p>
             <a:fld id="{F7021451-1387-4CA6-816F-3879F97B5CBC}" type="slidenum">
               <a:rPr lang="en-US"/>
-              <a:t>34</a:t>
+              <a:t>35</a:t>
             </a:fld>
             <a:endParaRPr lang="en-US"/>
           </a:p>
@@ -2694,7 +2694,7 @@
           <a:p>
             <a:fld id="{F7021451-1387-4CA6-816F-3879F97B5CBC}" type="slidenum">
               <a:rPr lang="en-US"/>
-              <a:t>35</a:t>
+              <a:t>36</a:t>
             </a:fld>
             <a:endParaRPr lang="en-US"/>
           </a:p>
@@ -2778,7 +2778,7 @@
           <a:p>
             <a:fld id="{F7021451-1387-4CA6-816F-3879F97B5CBC}" type="slidenum">
               <a:rPr lang="en-US"/>
-              <a:t>36</a:t>
+              <a:t>37</a:t>
             </a:fld>
             <a:endParaRPr lang="en-US"/>
           </a:p>
@@ -2862,7 +2862,7 @@
           <a:p>
             <a:fld id="{F7021451-1387-4CA6-816F-3879F97B5CBC}" type="slidenum">
               <a:rPr lang="en-US"/>
-              <a:t>37</a:t>
+              <a:t>38</a:t>
             </a:fld>
             <a:endParaRPr lang="en-US"/>
           </a:p>
@@ -2946,7 +2946,7 @@
           <a:p>
             <a:fld id="{F7021451-1387-4CA6-816F-3879F97B5CBC}" type="slidenum">
               <a:rPr lang="en-US"/>
-              <a:t>38</a:t>
+              <a:t>39</a:t>
             </a:fld>
             <a:endParaRPr lang="en-US"/>
           </a:p>
@@ -3030,7 +3030,7 @@
           <a:p>
             <a:fld id="{F7021451-1387-4CA6-816F-3879F97B5CBC}" type="slidenum">
               <a:rPr lang="en-US"/>
-              <a:t>39</a:t>
+              <a:t>40</a:t>
             </a:fld>
             <a:endParaRPr lang="en-US"/>
           </a:p>
@@ -3134,90 +3134,6 @@
 </file>
 
 <file path=ppt/notesSlides/notesSlide40.xml><?xml version="1.0" encoding="utf-8"?>
-<p:notes xmlns:a="http://schemas.openxmlformats.org/drawingml/2006/main" xmlns:r="http://schemas.openxmlformats.org/officeDocument/2006/relationships" xmlns:p="http://schemas.openxmlformats.org/presentationml/2006/main">
-  <p:cSld>
-    <p:spTree>
-      <p:nvGrpSpPr>
-        <p:cNvPr id="1" name=""/>
-        <p:cNvGrpSpPr/>
-        <p:nvPr/>
-      </p:nvGrpSpPr>
-      <p:grpSpPr>
-        <a:xfrm>
-          <a:off x="0" y="0"/>
-          <a:ext cx="0" cy="0"/>
-          <a:chOff x="0" y="0"/>
-          <a:chExt cx="0" cy="0"/>
-        </a:xfrm>
-      </p:grpSpPr>
-      <p:sp>
-        <p:nvSpPr>
-          <p:cNvPr id="2" name="Slide Image Placeholder 1"/>
-          <p:cNvSpPr>
-            <a:spLocks noGrp="1" noRot="1" noChangeAspect="1"/>
-          </p:cNvSpPr>
-          <p:nvPr>
-            <p:ph type="sldImg"/>
-          </p:nvPr>
-        </p:nvSpPr>
-        <p:spPr/>
-      </p:sp>
-      <p:sp>
-        <p:nvSpPr>
-          <p:cNvPr id="3" name="Notes Placeholder 2"/>
-          <p:cNvSpPr>
-            <a:spLocks noGrp="1"/>
-          </p:cNvSpPr>
-          <p:nvPr>
-            <p:ph type="body" idx="1"/>
-          </p:nvPr>
-        </p:nvSpPr>
-        <p:spPr/>
-        <p:txBody>
-          <a:bodyPr/>
-          <a:lstStyle/>
-          <a:p>
-            <a:endParaRPr lang="en-US" dirty="0"/>
-          </a:p>
-        </p:txBody>
-      </p:sp>
-      <p:sp>
-        <p:nvSpPr>
-          <p:cNvPr id="4" name="Slide Number Placeholder 3"/>
-          <p:cNvSpPr>
-            <a:spLocks noGrp="1"/>
-          </p:cNvSpPr>
-          <p:nvPr>
-            <p:ph type="sldNum" sz="quarter" idx="10"/>
-          </p:nvPr>
-        </p:nvSpPr>
-        <p:spPr/>
-        <p:txBody>
-          <a:bodyPr/>
-          <a:lstStyle/>
-          <a:p>
-            <a:fld id="{F7021451-1387-4CA6-816F-3879F97B5CBC}" type="slidenum">
-              <a:rPr lang="en-US"/>
-              <a:t>40</a:t>
-            </a:fld>
-            <a:endParaRPr lang="en-US"/>
-          </a:p>
-        </p:txBody>
-      </p:sp>
-    </p:spTree>
-    <p:extLst>
-      <p:ext uri="{BB962C8B-B14F-4D97-AF65-F5344CB8AC3E}">
-        <p14:creationId xmlns:p14="http://schemas.microsoft.com/office/powerpoint/2010/main" val="1024086991"/>
-      </p:ext>
-    </p:extLst>
-  </p:cSld>
-  <p:clrMapOvr>
-    <a:masterClrMapping/>
-  </p:clrMapOvr>
-</p:notes>
-</file>
-
-<file path=ppt/notesSlides/notesSlide41.xml><?xml version="1.0" encoding="utf-8"?>
 <p:notes xmlns:a="http://schemas.openxmlformats.org/drawingml/2006/main" xmlns:r="http://schemas.openxmlformats.org/officeDocument/2006/relationships" xmlns:p="http://schemas.openxmlformats.org/presentationml/2006/main">
   <p:cSld>
     <p:spTree>
@@ -3751,6 +3667,101 @@
 </p:sldLayout>
 </file>
 
+<file path=ppt/slideLayouts/slideLayout2.xml><?xml version="1.0" encoding="utf-8"?>
+<p:sldLayout xmlns:a="http://schemas.openxmlformats.org/drawingml/2006/main" xmlns:r="http://schemas.openxmlformats.org/officeDocument/2006/relationships" xmlns:p="http://schemas.openxmlformats.org/presentationml/2006/main" type="blank">
+  <p:cSld name="Blank">
+    <p:spTree>
+      <p:nvGrpSpPr>
+        <p:cNvPr id="1" name=""/>
+        <p:cNvGrpSpPr/>
+        <p:nvPr/>
+      </p:nvGrpSpPr>
+      <p:grpSpPr>
+        <a:xfrm>
+          <a:off x="0" y="0"/>
+          <a:ext cx="0" cy="0"/>
+          <a:chOff x="0" y="0"/>
+          <a:chExt cx="0" cy="0"/>
+        </a:xfrm>
+      </p:grpSpPr>
+      <p:sp>
+        <p:nvSpPr>
+          <p:cNvPr id="2" name="Date Placeholder 1"/>
+          <p:cNvSpPr>
+            <a:spLocks noGrp="1"/>
+          </p:cNvSpPr>
+          <p:nvPr>
+            <p:ph type="dt" sz="half" idx="10"/>
+          </p:nvPr>
+        </p:nvSpPr>
+        <p:spPr/>
+        <p:txBody>
+          <a:bodyPr/>
+          <a:lstStyle/>
+          <a:p>
+            <a:fld id="{5BCAD085-E8A6-8845-BD4E-CB4CCA059FC4}" type="datetimeFigureOut">
+              <a:rPr lang="en-US" smtClean="0"/>
+              <a:t>10/14/26</a:t>
+            </a:fld>
+            <a:endParaRPr lang="en-US"/>
+          </a:p>
+        </p:txBody>
+      </p:sp>
+      <p:sp>
+        <p:nvSpPr>
+          <p:cNvPr id="3" name="Footer Placeholder 2"/>
+          <p:cNvSpPr>
+            <a:spLocks noGrp="1"/>
+          </p:cNvSpPr>
+          <p:nvPr>
+            <p:ph type="ftr" sz="quarter" idx="11"/>
+          </p:nvPr>
+        </p:nvSpPr>
+        <p:spPr/>
+        <p:txBody>
+          <a:bodyPr/>
+          <a:lstStyle/>
+          <a:p>
+            <a:endParaRPr lang="en-US"/>
+          </a:p>
+        </p:txBody>
+      </p:sp>
+      <p:sp>
+        <p:nvSpPr>
+          <p:cNvPr id="4" name="Slide Number Placeholder 3"/>
+          <p:cNvSpPr>
+            <a:spLocks noGrp="1"/>
+          </p:cNvSpPr>
+          <p:nvPr>
+            <p:ph type="sldNum" sz="quarter" idx="12"/>
+          </p:nvPr>
+        </p:nvSpPr>
+        <p:spPr/>
+        <p:txBody>
+          <a:bodyPr/>
+          <a:lstStyle/>
+          <a:p>
+            <a:fld id="{C1FF6DA9-008F-8B48-92A6-B652298478BF}" type="slidenum">
+              <a:rPr lang="en-US" smtClean="0"/>
+              <a:t>‹#›</a:t>
+            </a:fld>
+            <a:endParaRPr lang="en-US"/>
+          </a:p>
+        </p:txBody>
+      </p:sp>
+    </p:spTree>
+    <p:extLst>
+      <p:ext uri="{BB962C8B-B14F-4D97-AF65-F5344CB8AC3E}">
+        <p14:creationId xmlns:p14="http://schemas.microsoft.com/office/powerpoint/2010/main" val="4056250820"/>
+      </p:ext>
+    </p:extLst>
+  </p:cSld>
+  <p:clrMapOvr>
+    <a:masterClrMapping/>
+  </p:clrMapOvr>
+</p:sldLayout>
+</file>
+
 <file path=ppt/slideMasters/slideMaster1.xml><?xml version="1.0" encoding="utf-8"?>
 <p:sldMaster xmlns:a="http://schemas.openxmlformats.org/drawingml/2006/main" xmlns:r="http://schemas.openxmlformats.org/officeDocument/2006/relationships" xmlns:p="http://schemas.openxmlformats.org/presentationml/2006/main">
   <p:cSld>
@@ -3778,6 +3789,7 @@
   <p:clrMap bg1="lt1" tx1="dk1" bg2="lt2" tx2="dk2" accent1="accent1" accent2="accent2" accent3="accent3" accent4="accent4" accent5="accent5" accent6="accent6" hlink="hlink" folHlink="folHlink"/>
   <p:sldLayoutIdLst>
     <p:sldLayoutId id="2147483649" r:id="rId1"/>
+    <p:sldLayoutId id="2147483650" r:id="rId2"/>
   </p:sldLayoutIdLst>
   <p:hf sldNum="0" hdr="0" ftr="0" dt="0"/>
   <p:txStyles>
@@ -4226,45 +4238,6 @@
       </p:sp>
       <p:sp>
         <p:nvSpPr>
-          <p:cNvPr id="6" name="Text 4"/>
-          <p:cNvSpPr/>
-          <p:nvPr/>
-        </p:nvSpPr>
-        <p:spPr>
-          <a:xfrm>
-            <a:off x="804672" y="5175504"/>
-            <a:ext cx="10789920" cy="429768"/>
-          </a:xfrm>
-          <a:prstGeom prst="rect">
-            <a:avLst/>
-          </a:prstGeom>
-          <a:noFill/>
-          <a:ln/>
-        </p:spPr>
-        <p:txBody>
-          <a:bodyPr wrap="square" lIns="445" tIns="445" rIns="445" bIns="445" rtlCol="0" anchor="ctr"/>
-          <a:lstStyle/>
-          <a:p>
-            <a:pPr marL="0" indent="0">
-              <a:buNone/>
-            </a:pPr>
-            <a:r>
-              <a:rPr lang="en-US" sz="1800" dirty="0">
-                <a:solidFill>
-                  <a:srgbClr val="D5E4F2"/>
-                </a:solidFill>
-                <a:latin typeface="Aptos" pitchFamily="34" charset="0"/>
-                <a:ea typeface="Aptos" pitchFamily="34" charset="-122"/>
-                <a:cs typeface="Aptos" pitchFamily="34" charset="-120"/>
-              </a:rPr>
-              <a:t>Self-study edition / 自習・復習にも使える詳しい授業資料</a:t>
-            </a:r>
-            <a:endParaRPr lang="en-US" sz="1800" dirty="0"/>
-          </a:p>
-        </p:txBody>
-      </p:sp>
-      <p:sp>
-        <p:nvSpPr>
           <p:cNvPr id="7" name="Text 5"/>
           <p:cNvSpPr/>
           <p:nvPr/>
@@ -4312,15 +4285,7 @@
 
 <file path=ppt/slides/slide10.xml><?xml version="1.0" encoding="utf-8"?>
 <p:sld xmlns:a="http://schemas.openxmlformats.org/drawingml/2006/main" xmlns:r="http://schemas.openxmlformats.org/officeDocument/2006/relationships" xmlns:p="http://schemas.openxmlformats.org/presentationml/2006/main">
-  <p:cSld name="Slide 10">
-    <p:bg>
-      <p:bgPr>
-        <a:solidFill>
-          <a:srgbClr val="F7FAFD"/>
-        </a:solidFill>
-        <a:effectLst/>
-      </p:bgPr>
-    </p:bg>
+  <p:cSld>
     <p:spTree>
       <p:nvGrpSpPr>
         <p:cNvPr id="1" name=""/>
@@ -4337,1451 +4302,2166 @@
       </p:grpSpPr>
       <p:sp>
         <p:nvSpPr>
-          <p:cNvPr id="2" name="Shape 0"/>
+          <p:cNvPr id="2" name="Rectangle 1"/>
           <p:cNvSpPr/>
           <p:nvPr/>
         </p:nvSpPr>
         <p:spPr>
           <a:xfrm>
             <a:off x="0" y="0"/>
-            <a:ext cx="12191695" cy="128016"/>
+            <a:ext cx="12191695" cy="100584"/>
           </a:xfrm>
           <a:prstGeom prst="rect">
             <a:avLst/>
           </a:prstGeom>
           <a:solidFill>
-            <a:srgbClr val="0D817E"/>
+            <a:srgbClr val="00897F"/>
           </a:solidFill>
+          <a:ln>
+            <a:noFill/>
+          </a:ln>
+        </p:spPr>
+        <p:style>
+          <a:lnRef idx="1">
+            <a:schemeClr val="accent1"/>
+          </a:lnRef>
+          <a:fillRef idx="3">
+            <a:schemeClr val="accent1"/>
+          </a:fillRef>
+          <a:effectRef idx="2">
+            <a:schemeClr val="accent1"/>
+          </a:effectRef>
+          <a:fontRef idx="minor">
+            <a:schemeClr val="lt1"/>
+          </a:fontRef>
+        </p:style>
+        <p:txBody>
+          <a:bodyPr rtlCol="0" anchor="ctr"/>
+          <a:lstStyle/>
+          <a:p>
+            <a:pPr algn="ctr"/>
+            <a:endParaRPr/>
+          </a:p>
+        </p:txBody>
+      </p:sp>
+      <p:sp>
+        <p:nvSpPr>
+          <p:cNvPr id="3" name="TextBox 2"/>
+          <p:cNvSpPr txBox="1"/>
+          <p:nvPr/>
+        </p:nvSpPr>
+        <p:spPr>
+          <a:xfrm>
+            <a:off x="475488" y="329184"/>
+            <a:ext cx="10058400" cy="438912"/>
+          </a:xfrm>
+          <a:prstGeom prst="rect">
+            <a:avLst/>
+          </a:prstGeom>
+          <a:noFill/>
+        </p:spPr>
+        <p:txBody>
+          <a:bodyPr wrap="square">
+            <a:spAutoFit/>
+          </a:bodyPr>
+          <a:lstStyle/>
+          <a:p>
+            <a:pPr>
+              <a:defRPr sz="2600" b="1">
+                <a:solidFill>
+                  <a:srgbClr val="1B2F4B"/>
+                </a:solidFill>
+                <a:latin typeface="Aptos"/>
+              </a:defRPr>
+            </a:pPr>
+            <a:r>
+              <a:t>PCA intuition: rotate the axes</a:t>
+            </a:r>
+          </a:p>
+        </p:txBody>
+      </p:sp>
+      <p:sp>
+        <p:nvSpPr>
+          <p:cNvPr id="4" name="TextBox 3"/>
+          <p:cNvSpPr txBox="1"/>
+          <p:nvPr/>
+        </p:nvSpPr>
+        <p:spPr>
+          <a:xfrm>
+            <a:off x="502920" y="822960"/>
+            <a:ext cx="9144000" cy="274320"/>
+          </a:xfrm>
+          <a:prstGeom prst="rect">
+            <a:avLst/>
+          </a:prstGeom>
+          <a:noFill/>
+        </p:spPr>
+        <p:txBody>
+          <a:bodyPr wrap="square">
+            <a:spAutoFit/>
+          </a:bodyPr>
+          <a:lstStyle/>
+          <a:p>
+            <a:pPr>
+              <a:defRPr sz="1500" b="1">
+                <a:solidFill>
+                  <a:srgbClr val="2F5B94"/>
+                </a:solidFill>
+                <a:latin typeface="Noto Sans CJK JP"/>
+              </a:defRPr>
+            </a:pPr>
+            <a:r>
+              <a:t>PCAの直感：座標軸を回転させる</a:t>
+            </a:r>
+          </a:p>
+        </p:txBody>
+      </p:sp>
+      <p:cxnSp>
+        <p:nvCxnSpPr>
+          <p:cNvPr id="5" name="Connector 4"/>
+          <p:cNvCxnSpPr/>
+          <p:nvPr/>
+        </p:nvCxnSpPr>
+        <p:spPr>
+          <a:xfrm>
+            <a:off x="475488" y="1216152"/>
+            <a:ext cx="11210544" cy="0"/>
+          </a:xfrm>
+          <a:prstGeom prst="line">
+            <a:avLst/>
+          </a:prstGeom>
           <a:ln w="12700">
             <a:solidFill>
-              <a:srgbClr val="0D817E"/>
+              <a:srgbClr val="DEE6EF"/>
             </a:solidFill>
-            <a:prstDash val="solid"/>
           </a:ln>
         </p:spPr>
-        <p:txBody>
-          <a:bodyPr/>
-          <a:lstStyle/>
-          <a:p>
-            <a:endParaRPr lang="en-JP"/>
-          </a:p>
-        </p:txBody>
-      </p:sp>
-      <p:sp>
-        <p:nvSpPr>
-          <p:cNvPr id="3" name="Text 1"/>
-          <p:cNvSpPr/>
-          <p:nvPr/>
-        </p:nvSpPr>
-        <p:spPr>
-          <a:xfrm>
-            <a:off x="457200" y="256032"/>
-            <a:ext cx="11201400" cy="438912"/>
-          </a:xfrm>
-          <a:prstGeom prst="rect">
-            <a:avLst/>
-          </a:prstGeom>
-          <a:noFill/>
-          <a:ln/>
-        </p:spPr>
-        <p:txBody>
-          <a:bodyPr wrap="square" lIns="445" tIns="445" rIns="445" bIns="445" rtlCol="0" anchor="ctr"/>
-          <a:lstStyle/>
-          <a:p>
-            <a:pPr marL="0" indent="0">
-              <a:buNone/>
-            </a:pPr>
-            <a:r>
-              <a:rPr lang="en-US" sz="2500" b="1" dirty="0">
-                <a:solidFill>
-                  <a:srgbClr val="18314C"/>
+        <p:style>
+          <a:lnRef idx="2">
+            <a:schemeClr val="accent1"/>
+          </a:lnRef>
+          <a:fillRef idx="0">
+            <a:schemeClr val="accent1"/>
+          </a:fillRef>
+          <a:effectRef idx="1">
+            <a:schemeClr val="accent1"/>
+          </a:effectRef>
+          <a:fontRef idx="minor">
+            <a:schemeClr val="tx1"/>
+          </a:fontRef>
+        </p:style>
+      </p:cxnSp>
+      <p:sp>
+        <p:nvSpPr>
+          <p:cNvPr id="6" name="Rounded Rectangle 5"/>
+          <p:cNvSpPr/>
+          <p:nvPr/>
+        </p:nvSpPr>
+        <p:spPr>
+          <a:xfrm>
+            <a:off x="530352" y="1435608"/>
+            <a:ext cx="6812280" cy="4498848"/>
+          </a:xfrm>
+          <a:prstGeom prst="roundRect">
+            <a:avLst/>
+          </a:prstGeom>
+          <a:solidFill>
+            <a:srgbClr val="FFFFFF"/>
+          </a:solidFill>
+          <a:ln>
+            <a:solidFill>
+              <a:srgbClr val="E1E9F0"/>
+            </a:solidFill>
+          </a:ln>
+        </p:spPr>
+        <p:style>
+          <a:lnRef idx="1">
+            <a:schemeClr val="accent1"/>
+          </a:lnRef>
+          <a:fillRef idx="3">
+            <a:schemeClr val="accent1"/>
+          </a:fillRef>
+          <a:effectRef idx="2">
+            <a:schemeClr val="accent1"/>
+          </a:effectRef>
+          <a:fontRef idx="minor">
+            <a:schemeClr val="lt1"/>
+          </a:fontRef>
+        </p:style>
+        <p:txBody>
+          <a:bodyPr rtlCol="0" anchor="ctr"/>
+          <a:lstStyle/>
+          <a:p>
+            <a:pPr algn="ctr"/>
+            <a:endParaRPr/>
+          </a:p>
+        </p:txBody>
+      </p:sp>
+      <p:cxnSp>
+        <p:nvCxnSpPr>
+          <p:cNvPr id="7" name="Connector 6"/>
+          <p:cNvCxnSpPr/>
+          <p:nvPr/>
+        </p:nvCxnSpPr>
+        <p:spPr>
+          <a:xfrm>
+            <a:off x="1133856" y="5422392"/>
+            <a:ext cx="5833872" cy="0"/>
+          </a:xfrm>
+          <a:prstGeom prst="line">
+            <a:avLst/>
+          </a:prstGeom>
+          <a:ln w="21590">
+            <a:solidFill>
+              <a:srgbClr val="5A6D83"/>
+            </a:solidFill>
+          </a:ln>
+        </p:spPr>
+        <p:style>
+          <a:lnRef idx="2">
+            <a:schemeClr val="accent1"/>
+          </a:lnRef>
+          <a:fillRef idx="0">
+            <a:schemeClr val="accent1"/>
+          </a:fillRef>
+          <a:effectRef idx="1">
+            <a:schemeClr val="accent1"/>
+          </a:effectRef>
+          <a:fontRef idx="minor">
+            <a:schemeClr val="tx1"/>
+          </a:fontRef>
+        </p:style>
+      </p:cxnSp>
+      <p:cxnSp>
+        <p:nvCxnSpPr>
+          <p:cNvPr id="8" name="Connector 7"/>
+          <p:cNvCxnSpPr/>
+          <p:nvPr/>
+        </p:nvCxnSpPr>
+        <p:spPr>
+          <a:xfrm flipV="1">
+            <a:off x="1133856" y="1901952"/>
+            <a:ext cx="0" cy="3520440"/>
+          </a:xfrm>
+          <a:prstGeom prst="line">
+            <a:avLst/>
+          </a:prstGeom>
+          <a:ln w="21590">
+            <a:solidFill>
+              <a:srgbClr val="5A6D83"/>
+            </a:solidFill>
+          </a:ln>
+        </p:spPr>
+        <p:style>
+          <a:lnRef idx="2">
+            <a:schemeClr val="accent1"/>
+          </a:lnRef>
+          <a:fillRef idx="0">
+            <a:schemeClr val="accent1"/>
+          </a:fillRef>
+          <a:effectRef idx="1">
+            <a:schemeClr val="accent1"/>
+          </a:effectRef>
+          <a:fontRef idx="minor">
+            <a:schemeClr val="tx1"/>
+          </a:fontRef>
+        </p:style>
+      </p:cxnSp>
+      <p:sp>
+        <p:nvSpPr>
+          <p:cNvPr id="9" name="TextBox 8"/>
+          <p:cNvSpPr txBox="1"/>
+          <p:nvPr/>
+        </p:nvSpPr>
+        <p:spPr>
+          <a:xfrm>
+            <a:off x="6995160" y="5266944"/>
+            <a:ext cx="393192" cy="323165"/>
+          </a:xfrm>
+          <a:prstGeom prst="rect">
+            <a:avLst/>
+          </a:prstGeom>
+          <a:noFill/>
+        </p:spPr>
+        <p:txBody>
+          <a:bodyPr wrap="square">
+            <a:spAutoFit/>
+          </a:bodyPr>
+          <a:lstStyle/>
+          <a:p>
+            <a:pPr>
+              <a:defRPr sz="1500" b="1">
+                <a:solidFill>
+                  <a:srgbClr val="5A6D83"/>
+                </a:solidFill>
+                <a:latin typeface="Aptos"/>
+              </a:defRPr>
+            </a:pPr>
+            <a:r>
+              <a:rPr dirty="0"/>
+              <a:t>x₁</a:t>
+            </a:r>
+          </a:p>
+        </p:txBody>
+      </p:sp>
+      <p:sp>
+        <p:nvSpPr>
+          <p:cNvPr id="10" name="TextBox 9"/>
+          <p:cNvSpPr txBox="1"/>
+          <p:nvPr/>
+        </p:nvSpPr>
+        <p:spPr>
+          <a:xfrm>
+            <a:off x="950976" y="1613718"/>
+            <a:ext cx="365760" cy="320040"/>
+          </a:xfrm>
+          <a:prstGeom prst="rect">
+            <a:avLst/>
+          </a:prstGeom>
+          <a:noFill/>
+        </p:spPr>
+        <p:txBody>
+          <a:bodyPr wrap="square">
+            <a:spAutoFit/>
+          </a:bodyPr>
+          <a:lstStyle/>
+          <a:p>
+            <a:pPr>
+              <a:defRPr sz="1500" b="1">
+                <a:solidFill>
+                  <a:srgbClr val="5A6D83"/>
+                </a:solidFill>
+                <a:latin typeface="Aptos"/>
+              </a:defRPr>
+            </a:pPr>
+            <a:r>
+              <a:t>x₂</a:t>
+            </a:r>
+          </a:p>
+        </p:txBody>
+      </p:sp>
+      <p:sp>
+        <p:nvSpPr>
+          <p:cNvPr id="11" name="Oval 10"/>
+          <p:cNvSpPr/>
+          <p:nvPr/>
+        </p:nvSpPr>
+        <p:spPr>
+          <a:xfrm>
+            <a:off x="1941385" y="5057190"/>
+            <a:ext cx="124358" cy="124358"/>
+          </a:xfrm>
+          <a:prstGeom prst="ellipse">
+            <a:avLst/>
+          </a:prstGeom>
+          <a:solidFill>
+            <a:srgbClr val="2F5B94"/>
+          </a:solidFill>
+          <a:ln>
+            <a:noFill/>
+          </a:ln>
+        </p:spPr>
+        <p:style>
+          <a:lnRef idx="1">
+            <a:schemeClr val="accent1"/>
+          </a:lnRef>
+          <a:fillRef idx="3">
+            <a:schemeClr val="accent1"/>
+          </a:fillRef>
+          <a:effectRef idx="2">
+            <a:schemeClr val="accent1"/>
+          </a:effectRef>
+          <a:fontRef idx="minor">
+            <a:schemeClr val="lt1"/>
+          </a:fontRef>
+        </p:style>
+        <p:txBody>
+          <a:bodyPr rtlCol="0" anchor="ctr"/>
+          <a:lstStyle/>
+          <a:p>
+            <a:pPr algn="ctr"/>
+            <a:endParaRPr/>
+          </a:p>
+        </p:txBody>
+      </p:sp>
+      <p:sp>
+        <p:nvSpPr>
+          <p:cNvPr id="12" name="Oval 11"/>
+          <p:cNvSpPr/>
+          <p:nvPr/>
+        </p:nvSpPr>
+        <p:spPr>
+          <a:xfrm>
+            <a:off x="2226814" y="5116892"/>
+            <a:ext cx="124358" cy="124358"/>
+          </a:xfrm>
+          <a:prstGeom prst="ellipse">
+            <a:avLst/>
+          </a:prstGeom>
+          <a:solidFill>
+            <a:srgbClr val="2F5B94"/>
+          </a:solidFill>
+          <a:ln>
+            <a:noFill/>
+          </a:ln>
+        </p:spPr>
+        <p:style>
+          <a:lnRef idx="1">
+            <a:schemeClr val="accent1"/>
+          </a:lnRef>
+          <a:fillRef idx="3">
+            <a:schemeClr val="accent1"/>
+          </a:fillRef>
+          <a:effectRef idx="2">
+            <a:schemeClr val="accent1"/>
+          </a:effectRef>
+          <a:fontRef idx="minor">
+            <a:schemeClr val="lt1"/>
+          </a:fontRef>
+        </p:style>
+        <p:txBody>
+          <a:bodyPr rtlCol="0" anchor="ctr"/>
+          <a:lstStyle/>
+          <a:p>
+            <a:pPr algn="ctr"/>
+            <a:endParaRPr/>
+          </a:p>
+        </p:txBody>
+      </p:sp>
+      <p:sp>
+        <p:nvSpPr>
+          <p:cNvPr id="13" name="Oval 12"/>
+          <p:cNvSpPr/>
+          <p:nvPr/>
+        </p:nvSpPr>
+        <p:spPr>
+          <a:xfrm>
+            <a:off x="2200476" y="4793254"/>
+            <a:ext cx="124358" cy="124358"/>
+          </a:xfrm>
+          <a:prstGeom prst="ellipse">
+            <a:avLst/>
+          </a:prstGeom>
+          <a:solidFill>
+            <a:srgbClr val="2F5B94"/>
+          </a:solidFill>
+          <a:ln>
+            <a:noFill/>
+          </a:ln>
+        </p:spPr>
+        <p:style>
+          <a:lnRef idx="1">
+            <a:schemeClr val="accent1"/>
+          </a:lnRef>
+          <a:fillRef idx="3">
+            <a:schemeClr val="accent1"/>
+          </a:fillRef>
+          <a:effectRef idx="2">
+            <a:schemeClr val="accent1"/>
+          </a:effectRef>
+          <a:fontRef idx="minor">
+            <a:schemeClr val="lt1"/>
+          </a:fontRef>
+        </p:style>
+        <p:txBody>
+          <a:bodyPr rtlCol="0" anchor="ctr"/>
+          <a:lstStyle/>
+          <a:p>
+            <a:pPr algn="ctr"/>
+            <a:endParaRPr/>
+          </a:p>
+        </p:txBody>
+      </p:sp>
+      <p:sp>
+        <p:nvSpPr>
+          <p:cNvPr id="14" name="Oval 13"/>
+          <p:cNvSpPr/>
+          <p:nvPr/>
+        </p:nvSpPr>
+        <p:spPr>
+          <a:xfrm>
+            <a:off x="2546438" y="4933286"/>
+            <a:ext cx="124358" cy="124358"/>
+          </a:xfrm>
+          <a:prstGeom prst="ellipse">
+            <a:avLst/>
+          </a:prstGeom>
+          <a:solidFill>
+            <a:srgbClr val="2F5B94"/>
+          </a:solidFill>
+          <a:ln>
+            <a:noFill/>
+          </a:ln>
+        </p:spPr>
+        <p:style>
+          <a:lnRef idx="1">
+            <a:schemeClr val="accent1"/>
+          </a:lnRef>
+          <a:fillRef idx="3">
+            <a:schemeClr val="accent1"/>
+          </a:fillRef>
+          <a:effectRef idx="2">
+            <a:schemeClr val="accent1"/>
+          </a:effectRef>
+          <a:fontRef idx="minor">
+            <a:schemeClr val="lt1"/>
+          </a:fontRef>
+        </p:style>
+        <p:txBody>
+          <a:bodyPr rtlCol="0" anchor="ctr"/>
+          <a:lstStyle/>
+          <a:p>
+            <a:pPr algn="ctr"/>
+            <a:endParaRPr/>
+          </a:p>
+        </p:txBody>
+      </p:sp>
+      <p:sp>
+        <p:nvSpPr>
+          <p:cNvPr id="15" name="Oval 14"/>
+          <p:cNvSpPr/>
+          <p:nvPr/>
+        </p:nvSpPr>
+        <p:spPr>
+          <a:xfrm>
+            <a:off x="2536609" y="4631556"/>
+            <a:ext cx="124358" cy="124358"/>
+          </a:xfrm>
+          <a:prstGeom prst="ellipse">
+            <a:avLst/>
+          </a:prstGeom>
+          <a:solidFill>
+            <a:srgbClr val="2F5B94"/>
+          </a:solidFill>
+          <a:ln>
+            <a:noFill/>
+          </a:ln>
+        </p:spPr>
+        <p:style>
+          <a:lnRef idx="1">
+            <a:schemeClr val="accent1"/>
+          </a:lnRef>
+          <a:fillRef idx="3">
+            <a:schemeClr val="accent1"/>
+          </a:fillRef>
+          <a:effectRef idx="2">
+            <a:schemeClr val="accent1"/>
+          </a:effectRef>
+          <a:fontRef idx="minor">
+            <a:schemeClr val="lt1"/>
+          </a:fontRef>
+        </p:style>
+        <p:txBody>
+          <a:bodyPr rtlCol="0" anchor="ctr"/>
+          <a:lstStyle/>
+          <a:p>
+            <a:pPr algn="ctr"/>
+            <a:endParaRPr/>
+          </a:p>
+        </p:txBody>
+      </p:sp>
+      <p:sp>
+        <p:nvSpPr>
+          <p:cNvPr id="16" name="Oval 15"/>
+          <p:cNvSpPr/>
+          <p:nvPr/>
+        </p:nvSpPr>
+        <p:spPr>
+          <a:xfrm>
+            <a:off x="2866062" y="4749680"/>
+            <a:ext cx="124358" cy="124358"/>
+          </a:xfrm>
+          <a:prstGeom prst="ellipse">
+            <a:avLst/>
+          </a:prstGeom>
+          <a:solidFill>
+            <a:srgbClr val="2F5B94"/>
+          </a:solidFill>
+          <a:ln>
+            <a:noFill/>
+          </a:ln>
+        </p:spPr>
+        <p:style>
+          <a:lnRef idx="1">
+            <a:schemeClr val="accent1"/>
+          </a:lnRef>
+          <a:fillRef idx="3">
+            <a:schemeClr val="accent1"/>
+          </a:fillRef>
+          <a:effectRef idx="2">
+            <a:schemeClr val="accent1"/>
+          </a:effectRef>
+          <a:fontRef idx="minor">
+            <a:schemeClr val="lt1"/>
+          </a:fontRef>
+        </p:style>
+        <p:txBody>
+          <a:bodyPr rtlCol="0" anchor="ctr"/>
+          <a:lstStyle/>
+          <a:p>
+            <a:pPr algn="ctr"/>
+            <a:endParaRPr/>
+          </a:p>
+        </p:txBody>
+      </p:sp>
+      <p:sp>
+        <p:nvSpPr>
+          <p:cNvPr id="17" name="Oval 16"/>
+          <p:cNvSpPr/>
+          <p:nvPr/>
+        </p:nvSpPr>
+        <p:spPr>
+          <a:xfrm>
+            <a:off x="2792101" y="4393231"/>
+            <a:ext cx="124358" cy="124358"/>
+          </a:xfrm>
+          <a:prstGeom prst="ellipse">
+            <a:avLst/>
+          </a:prstGeom>
+          <a:solidFill>
+            <a:srgbClr val="2F5B94"/>
+          </a:solidFill>
+          <a:ln>
+            <a:noFill/>
+          </a:ln>
+        </p:spPr>
+        <p:style>
+          <a:lnRef idx="1">
+            <a:schemeClr val="accent1"/>
+          </a:lnRef>
+          <a:fillRef idx="3">
+            <a:schemeClr val="accent1"/>
+          </a:fillRef>
+          <a:effectRef idx="2">
+            <a:schemeClr val="accent1"/>
+          </a:effectRef>
+          <a:fontRef idx="minor">
+            <a:schemeClr val="lt1"/>
+          </a:fontRef>
+        </p:style>
+        <p:txBody>
+          <a:bodyPr rtlCol="0" anchor="ctr"/>
+          <a:lstStyle/>
+          <a:p>
+            <a:pPr algn="ctr"/>
+            <a:endParaRPr/>
+          </a:p>
+        </p:txBody>
+      </p:sp>
+      <p:sp>
+        <p:nvSpPr>
+          <p:cNvPr id="18" name="Oval 17"/>
+          <p:cNvSpPr/>
+          <p:nvPr/>
+        </p:nvSpPr>
+        <p:spPr>
+          <a:xfrm>
+            <a:off x="3092239" y="4487647"/>
+            <a:ext cx="124358" cy="124358"/>
+          </a:xfrm>
+          <a:prstGeom prst="ellipse">
+            <a:avLst/>
+          </a:prstGeom>
+          <a:solidFill>
+            <a:srgbClr val="2F5B94"/>
+          </a:solidFill>
+          <a:ln>
+            <a:noFill/>
+          </a:ln>
+        </p:spPr>
+        <p:style>
+          <a:lnRef idx="1">
+            <a:schemeClr val="accent1"/>
+          </a:lnRef>
+          <a:fillRef idx="3">
+            <a:schemeClr val="accent1"/>
+          </a:fillRef>
+          <a:effectRef idx="2">
+            <a:schemeClr val="accent1"/>
+          </a:effectRef>
+          <a:fontRef idx="minor">
+            <a:schemeClr val="lt1"/>
+          </a:fontRef>
+        </p:style>
+        <p:txBody>
+          <a:bodyPr rtlCol="0" anchor="ctr"/>
+          <a:lstStyle/>
+          <a:p>
+            <a:pPr algn="ctr"/>
+            <a:endParaRPr/>
+          </a:p>
+        </p:txBody>
+      </p:sp>
+      <p:sp>
+        <p:nvSpPr>
+          <p:cNvPr id="19" name="Oval 18"/>
+          <p:cNvSpPr/>
+          <p:nvPr/>
+        </p:nvSpPr>
+        <p:spPr>
+          <a:xfrm>
+            <a:off x="3052991" y="4116489"/>
+            <a:ext cx="124358" cy="124358"/>
+          </a:xfrm>
+          <a:prstGeom prst="ellipse">
+            <a:avLst/>
+          </a:prstGeom>
+          <a:solidFill>
+            <a:srgbClr val="2F5B94"/>
+          </a:solidFill>
+          <a:ln>
+            <a:noFill/>
+          </a:ln>
+        </p:spPr>
+        <p:style>
+          <a:lnRef idx="1">
+            <a:schemeClr val="accent1"/>
+          </a:lnRef>
+          <a:fillRef idx="3">
+            <a:schemeClr val="accent1"/>
+          </a:fillRef>
+          <a:effectRef idx="2">
+            <a:schemeClr val="accent1"/>
+          </a:effectRef>
+          <a:fontRef idx="minor">
+            <a:schemeClr val="lt1"/>
+          </a:fontRef>
+        </p:style>
+        <p:txBody>
+          <a:bodyPr rtlCol="0" anchor="ctr"/>
+          <a:lstStyle/>
+          <a:p>
+            <a:pPr algn="ctr"/>
+            <a:endParaRPr/>
+          </a:p>
+        </p:txBody>
+      </p:sp>
+      <p:sp>
+        <p:nvSpPr>
+          <p:cNvPr id="20" name="Oval 19"/>
+          <p:cNvSpPr/>
+          <p:nvPr/>
+        </p:nvSpPr>
+        <p:spPr>
+          <a:xfrm>
+            <a:off x="3338524" y="4221911"/>
+            <a:ext cx="124358" cy="124358"/>
+          </a:xfrm>
+          <a:prstGeom prst="ellipse">
+            <a:avLst/>
+          </a:prstGeom>
+          <a:solidFill>
+            <a:srgbClr val="2F5B94"/>
+          </a:solidFill>
+          <a:ln>
+            <a:noFill/>
+          </a:ln>
+        </p:spPr>
+        <p:style>
+          <a:lnRef idx="1">
+            <a:schemeClr val="accent1"/>
+          </a:lnRef>
+          <a:fillRef idx="3">
+            <a:schemeClr val="accent1"/>
+          </a:fillRef>
+          <a:effectRef idx="2">
+            <a:schemeClr val="accent1"/>
+          </a:effectRef>
+          <a:fontRef idx="minor">
+            <a:schemeClr val="lt1"/>
+          </a:fontRef>
+        </p:style>
+        <p:txBody>
+          <a:bodyPr rtlCol="0" anchor="ctr"/>
+          <a:lstStyle/>
+          <a:p>
+            <a:pPr algn="ctr"/>
+            <a:endParaRPr/>
+          </a:p>
+        </p:txBody>
+      </p:sp>
+      <p:sp>
+        <p:nvSpPr>
+          <p:cNvPr id="21" name="Oval 20"/>
+          <p:cNvSpPr/>
+          <p:nvPr/>
+        </p:nvSpPr>
+        <p:spPr>
+          <a:xfrm>
+            <a:off x="3383725" y="3993208"/>
+            <a:ext cx="124358" cy="124358"/>
+          </a:xfrm>
+          <a:prstGeom prst="ellipse">
+            <a:avLst/>
+          </a:prstGeom>
+          <a:solidFill>
+            <a:srgbClr val="2F5B94"/>
+          </a:solidFill>
+          <a:ln>
+            <a:noFill/>
+          </a:ln>
+        </p:spPr>
+        <p:style>
+          <a:lnRef idx="1">
+            <a:schemeClr val="accent1"/>
+          </a:lnRef>
+          <a:fillRef idx="3">
+            <a:schemeClr val="accent1"/>
+          </a:fillRef>
+          <a:effectRef idx="2">
+            <a:schemeClr val="accent1"/>
+          </a:effectRef>
+          <a:fontRef idx="minor">
+            <a:schemeClr val="lt1"/>
+          </a:fontRef>
+        </p:style>
+        <p:txBody>
+          <a:bodyPr rtlCol="0" anchor="ctr"/>
+          <a:lstStyle/>
+          <a:p>
+            <a:pPr algn="ctr"/>
+            <a:endParaRPr/>
+          </a:p>
+        </p:txBody>
+      </p:sp>
+      <p:sp>
+        <p:nvSpPr>
+          <p:cNvPr id="22" name="Oval 21"/>
+          <p:cNvSpPr/>
+          <p:nvPr/>
+        </p:nvSpPr>
+        <p:spPr>
+          <a:xfrm>
+            <a:off x="3698469" y="4076618"/>
+            <a:ext cx="124358" cy="124358"/>
+          </a:xfrm>
+          <a:prstGeom prst="ellipse">
+            <a:avLst/>
+          </a:prstGeom>
+          <a:solidFill>
+            <a:srgbClr val="2F5B94"/>
+          </a:solidFill>
+          <a:ln>
+            <a:noFill/>
+          </a:ln>
+        </p:spPr>
+        <p:style>
+          <a:lnRef idx="1">
+            <a:schemeClr val="accent1"/>
+          </a:lnRef>
+          <a:fillRef idx="3">
+            <a:schemeClr val="accent1"/>
+          </a:fillRef>
+          <a:effectRef idx="2">
+            <a:schemeClr val="accent1"/>
+          </a:effectRef>
+          <a:fontRef idx="minor">
+            <a:schemeClr val="lt1"/>
+          </a:fontRef>
+        </p:style>
+        <p:txBody>
+          <a:bodyPr rtlCol="0" anchor="ctr"/>
+          <a:lstStyle/>
+          <a:p>
+            <a:pPr algn="ctr"/>
+            <a:endParaRPr/>
+          </a:p>
+        </p:txBody>
+      </p:sp>
+      <p:sp>
+        <p:nvSpPr>
+          <p:cNvPr id="23" name="Oval 22"/>
+          <p:cNvSpPr/>
+          <p:nvPr/>
+        </p:nvSpPr>
+        <p:spPr>
+          <a:xfrm>
+            <a:off x="3644616" y="3716466"/>
+            <a:ext cx="124358" cy="124358"/>
+          </a:xfrm>
+          <a:prstGeom prst="ellipse">
+            <a:avLst/>
+          </a:prstGeom>
+          <a:solidFill>
+            <a:srgbClr val="2F5B94"/>
+          </a:solidFill>
+          <a:ln>
+            <a:noFill/>
+          </a:ln>
+        </p:spPr>
+        <p:style>
+          <a:lnRef idx="1">
+            <a:schemeClr val="accent1"/>
+          </a:lnRef>
+          <a:fillRef idx="3">
+            <a:schemeClr val="accent1"/>
+          </a:fillRef>
+          <a:effectRef idx="2">
+            <a:schemeClr val="accent1"/>
+          </a:effectRef>
+          <a:fontRef idx="minor">
+            <a:schemeClr val="lt1"/>
+          </a:fontRef>
+        </p:style>
+        <p:txBody>
+          <a:bodyPr rtlCol="0" anchor="ctr"/>
+          <a:lstStyle/>
+          <a:p>
+            <a:pPr algn="ctr"/>
+            <a:endParaRPr/>
+          </a:p>
+        </p:txBody>
+      </p:sp>
+      <p:sp>
+        <p:nvSpPr>
+          <p:cNvPr id="24" name="Oval 23"/>
+          <p:cNvSpPr/>
+          <p:nvPr/>
+        </p:nvSpPr>
+        <p:spPr>
+          <a:xfrm>
+            <a:off x="3948561" y="3876711"/>
+            <a:ext cx="124358" cy="124358"/>
+          </a:xfrm>
+          <a:prstGeom prst="ellipse">
+            <a:avLst/>
+          </a:prstGeom>
+          <a:solidFill>
+            <a:srgbClr val="2F5B94"/>
+          </a:solidFill>
+          <a:ln>
+            <a:noFill/>
+          </a:ln>
+        </p:spPr>
+        <p:style>
+          <a:lnRef idx="1">
+            <a:schemeClr val="accent1"/>
+          </a:lnRef>
+          <a:fillRef idx="3">
+            <a:schemeClr val="accent1"/>
+          </a:fillRef>
+          <a:effectRef idx="2">
+            <a:schemeClr val="accent1"/>
+          </a:effectRef>
+          <a:fontRef idx="minor">
+            <a:schemeClr val="lt1"/>
+          </a:fontRef>
+        </p:style>
+        <p:txBody>
+          <a:bodyPr rtlCol="0" anchor="ctr"/>
+          <a:lstStyle/>
+          <a:p>
+            <a:pPr algn="ctr"/>
+            <a:endParaRPr/>
+          </a:p>
+        </p:txBody>
+      </p:sp>
+      <p:sp>
+        <p:nvSpPr>
+          <p:cNvPr id="25" name="Oval 24"/>
+          <p:cNvSpPr/>
+          <p:nvPr/>
+        </p:nvSpPr>
+        <p:spPr>
+          <a:xfrm>
+            <a:off x="3894708" y="3516558"/>
+            <a:ext cx="124358" cy="124358"/>
+          </a:xfrm>
+          <a:prstGeom prst="ellipse">
+            <a:avLst/>
+          </a:prstGeom>
+          <a:solidFill>
+            <a:srgbClr val="2F5B94"/>
+          </a:solidFill>
+          <a:ln>
+            <a:noFill/>
+          </a:ln>
+        </p:spPr>
+        <p:style>
+          <a:lnRef idx="1">
+            <a:schemeClr val="accent1"/>
+          </a:lnRef>
+          <a:fillRef idx="3">
+            <a:schemeClr val="accent1"/>
+          </a:fillRef>
+          <a:effectRef idx="2">
+            <a:schemeClr val="accent1"/>
+          </a:effectRef>
+          <a:fontRef idx="minor">
+            <a:schemeClr val="lt1"/>
+          </a:fontRef>
+        </p:style>
+        <p:txBody>
+          <a:bodyPr rtlCol="0" anchor="ctr"/>
+          <a:lstStyle/>
+          <a:p>
+            <a:pPr algn="ctr"/>
+            <a:endParaRPr/>
+          </a:p>
+        </p:txBody>
+      </p:sp>
+      <p:sp>
+        <p:nvSpPr>
+          <p:cNvPr id="26" name="Oval 25"/>
+          <p:cNvSpPr/>
+          <p:nvPr/>
+        </p:nvSpPr>
+        <p:spPr>
+          <a:xfrm>
+            <a:off x="4209452" y="3599969"/>
+            <a:ext cx="124358" cy="124358"/>
+          </a:xfrm>
+          <a:prstGeom prst="ellipse">
+            <a:avLst/>
+          </a:prstGeom>
+          <a:solidFill>
+            <a:srgbClr val="2F5B94"/>
+          </a:solidFill>
+          <a:ln>
+            <a:noFill/>
+          </a:ln>
+        </p:spPr>
+        <p:style>
+          <a:lnRef idx="1">
+            <a:schemeClr val="accent1"/>
+          </a:lnRef>
+          <a:fillRef idx="3">
+            <a:schemeClr val="accent1"/>
+          </a:fillRef>
+          <a:effectRef idx="2">
+            <a:schemeClr val="accent1"/>
+          </a:effectRef>
+          <a:fontRef idx="minor">
+            <a:schemeClr val="lt1"/>
+          </a:fontRef>
+        </p:style>
+        <p:txBody>
+          <a:bodyPr rtlCol="0" anchor="ctr"/>
+          <a:lstStyle/>
+          <a:p>
+            <a:pPr algn="ctr"/>
+            <a:endParaRPr/>
+          </a:p>
+        </p:txBody>
+      </p:sp>
+      <p:sp>
+        <p:nvSpPr>
+          <p:cNvPr id="27" name="Oval 26"/>
+          <p:cNvSpPr/>
+          <p:nvPr/>
+        </p:nvSpPr>
+        <p:spPr>
+          <a:xfrm>
+            <a:off x="4254652" y="3371265"/>
+            <a:ext cx="124358" cy="124358"/>
+          </a:xfrm>
+          <a:prstGeom prst="ellipse">
+            <a:avLst/>
+          </a:prstGeom>
+          <a:solidFill>
+            <a:srgbClr val="2F5B94"/>
+          </a:solidFill>
+          <a:ln>
+            <a:noFill/>
+          </a:ln>
+        </p:spPr>
+        <p:style>
+          <a:lnRef idx="1">
+            <a:schemeClr val="accent1"/>
+          </a:lnRef>
+          <a:fillRef idx="3">
+            <a:schemeClr val="accent1"/>
+          </a:fillRef>
+          <a:effectRef idx="2">
+            <a:schemeClr val="accent1"/>
+          </a:effectRef>
+          <a:fontRef idx="minor">
+            <a:schemeClr val="lt1"/>
+          </a:fontRef>
+        </p:style>
+        <p:txBody>
+          <a:bodyPr rtlCol="0" anchor="ctr"/>
+          <a:lstStyle/>
+          <a:p>
+            <a:pPr algn="ctr"/>
+            <a:endParaRPr/>
+          </a:p>
+        </p:txBody>
+      </p:sp>
+      <p:sp>
+        <p:nvSpPr>
+          <p:cNvPr id="28" name="Oval 27"/>
+          <p:cNvSpPr/>
+          <p:nvPr/>
+        </p:nvSpPr>
+        <p:spPr>
+          <a:xfrm>
+            <a:off x="4540185" y="3476688"/>
+            <a:ext cx="124358" cy="124358"/>
+          </a:xfrm>
+          <a:prstGeom prst="ellipse">
+            <a:avLst/>
+          </a:prstGeom>
+          <a:solidFill>
+            <a:srgbClr val="2F5B94"/>
+          </a:solidFill>
+          <a:ln>
+            <a:noFill/>
+          </a:ln>
+        </p:spPr>
+        <p:style>
+          <a:lnRef idx="1">
+            <a:schemeClr val="accent1"/>
+          </a:lnRef>
+          <a:fillRef idx="3">
+            <a:schemeClr val="accent1"/>
+          </a:fillRef>
+          <a:effectRef idx="2">
+            <a:schemeClr val="accent1"/>
+          </a:effectRef>
+          <a:fontRef idx="minor">
+            <a:schemeClr val="lt1"/>
+          </a:fontRef>
+        </p:style>
+        <p:txBody>
+          <a:bodyPr rtlCol="0" anchor="ctr"/>
+          <a:lstStyle/>
+          <a:p>
+            <a:pPr algn="ctr"/>
+            <a:endParaRPr/>
+          </a:p>
+        </p:txBody>
+      </p:sp>
+      <p:sp>
+        <p:nvSpPr>
+          <p:cNvPr id="29" name="Oval 28"/>
+          <p:cNvSpPr/>
+          <p:nvPr/>
+        </p:nvSpPr>
+        <p:spPr>
+          <a:xfrm>
+            <a:off x="4500938" y="3105530"/>
+            <a:ext cx="124358" cy="124358"/>
+          </a:xfrm>
+          <a:prstGeom prst="ellipse">
+            <a:avLst/>
+          </a:prstGeom>
+          <a:solidFill>
+            <a:srgbClr val="2F5B94"/>
+          </a:solidFill>
+          <a:ln>
+            <a:noFill/>
+          </a:ln>
+        </p:spPr>
+        <p:style>
+          <a:lnRef idx="1">
+            <a:schemeClr val="accent1"/>
+          </a:lnRef>
+          <a:fillRef idx="3">
+            <a:schemeClr val="accent1"/>
+          </a:fillRef>
+          <a:effectRef idx="2">
+            <a:schemeClr val="accent1"/>
+          </a:effectRef>
+          <a:fontRef idx="minor">
+            <a:schemeClr val="lt1"/>
+          </a:fontRef>
+        </p:style>
+        <p:txBody>
+          <a:bodyPr rtlCol="0" anchor="ctr"/>
+          <a:lstStyle/>
+          <a:p>
+            <a:pPr algn="ctr"/>
+            <a:endParaRPr/>
+          </a:p>
+        </p:txBody>
+      </p:sp>
+      <p:sp>
+        <p:nvSpPr>
+          <p:cNvPr id="30" name="Oval 29"/>
+          <p:cNvSpPr/>
+          <p:nvPr/>
+        </p:nvSpPr>
+        <p:spPr>
+          <a:xfrm>
+            <a:off x="4801076" y="3199946"/>
+            <a:ext cx="124358" cy="124358"/>
+          </a:xfrm>
+          <a:prstGeom prst="ellipse">
+            <a:avLst/>
+          </a:prstGeom>
+          <a:solidFill>
+            <a:srgbClr val="2F5B94"/>
+          </a:solidFill>
+          <a:ln>
+            <a:noFill/>
+          </a:ln>
+        </p:spPr>
+        <p:style>
+          <a:lnRef idx="1">
+            <a:schemeClr val="accent1"/>
+          </a:lnRef>
+          <a:fillRef idx="3">
+            <a:schemeClr val="accent1"/>
+          </a:fillRef>
+          <a:effectRef idx="2">
+            <a:schemeClr val="accent1"/>
+          </a:effectRef>
+          <a:fontRef idx="minor">
+            <a:schemeClr val="lt1"/>
+          </a:fontRef>
+        </p:style>
+        <p:txBody>
+          <a:bodyPr rtlCol="0" anchor="ctr"/>
+          <a:lstStyle/>
+          <a:p>
+            <a:pPr algn="ctr"/>
+            <a:endParaRPr/>
+          </a:p>
+        </p:txBody>
+      </p:sp>
+      <p:sp>
+        <p:nvSpPr>
+          <p:cNvPr id="31" name="Oval 30"/>
+          <p:cNvSpPr/>
+          <p:nvPr/>
+        </p:nvSpPr>
+        <p:spPr>
+          <a:xfrm>
+            <a:off x="4727115" y="2843497"/>
+            <a:ext cx="124358" cy="124358"/>
+          </a:xfrm>
+          <a:prstGeom prst="ellipse">
+            <a:avLst/>
+          </a:prstGeom>
+          <a:solidFill>
+            <a:srgbClr val="2F5B94"/>
+          </a:solidFill>
+          <a:ln>
+            <a:noFill/>
+          </a:ln>
+        </p:spPr>
+        <p:style>
+          <a:lnRef idx="1">
+            <a:schemeClr val="accent1"/>
+          </a:lnRef>
+          <a:fillRef idx="3">
+            <a:schemeClr val="accent1"/>
+          </a:fillRef>
+          <a:effectRef idx="2">
+            <a:schemeClr val="accent1"/>
+          </a:effectRef>
+          <a:fontRef idx="minor">
+            <a:schemeClr val="lt1"/>
+          </a:fontRef>
+        </p:style>
+        <p:txBody>
+          <a:bodyPr rtlCol="0" anchor="ctr"/>
+          <a:lstStyle/>
+          <a:p>
+            <a:pPr algn="ctr"/>
+            <a:endParaRPr/>
+          </a:p>
+        </p:txBody>
+      </p:sp>
+      <p:sp>
+        <p:nvSpPr>
+          <p:cNvPr id="32" name="Oval 31"/>
+          <p:cNvSpPr/>
+          <p:nvPr/>
+        </p:nvSpPr>
+        <p:spPr>
+          <a:xfrm>
+            <a:off x="5056568" y="2961621"/>
+            <a:ext cx="124358" cy="124358"/>
+          </a:xfrm>
+          <a:prstGeom prst="ellipse">
+            <a:avLst/>
+          </a:prstGeom>
+          <a:solidFill>
+            <a:srgbClr val="2F5B94"/>
+          </a:solidFill>
+          <a:ln>
+            <a:noFill/>
+          </a:ln>
+        </p:spPr>
+        <p:style>
+          <a:lnRef idx="1">
+            <a:schemeClr val="accent1"/>
+          </a:lnRef>
+          <a:fillRef idx="3">
+            <a:schemeClr val="accent1"/>
+          </a:fillRef>
+          <a:effectRef idx="2">
+            <a:schemeClr val="accent1"/>
+          </a:effectRef>
+          <a:fontRef idx="minor">
+            <a:schemeClr val="lt1"/>
+          </a:fontRef>
+        </p:style>
+        <p:txBody>
+          <a:bodyPr rtlCol="0" anchor="ctr"/>
+          <a:lstStyle/>
+          <a:p>
+            <a:pPr algn="ctr"/>
+            <a:endParaRPr/>
+          </a:p>
+        </p:txBody>
+      </p:sp>
+      <p:sp>
+        <p:nvSpPr>
+          <p:cNvPr id="33" name="Oval 32"/>
+          <p:cNvSpPr/>
+          <p:nvPr/>
+        </p:nvSpPr>
+        <p:spPr>
+          <a:xfrm>
+            <a:off x="5046738" y="2659891"/>
+            <a:ext cx="124358" cy="124358"/>
+          </a:xfrm>
+          <a:prstGeom prst="ellipse">
+            <a:avLst/>
+          </a:prstGeom>
+          <a:solidFill>
+            <a:srgbClr val="2F5B94"/>
+          </a:solidFill>
+          <a:ln>
+            <a:noFill/>
+          </a:ln>
+        </p:spPr>
+        <p:style>
+          <a:lnRef idx="1">
+            <a:schemeClr val="accent1"/>
+          </a:lnRef>
+          <a:fillRef idx="3">
+            <a:schemeClr val="accent1"/>
+          </a:fillRef>
+          <a:effectRef idx="2">
+            <a:schemeClr val="accent1"/>
+          </a:effectRef>
+          <a:fontRef idx="minor">
+            <a:schemeClr val="lt1"/>
+          </a:fontRef>
+        </p:style>
+        <p:txBody>
+          <a:bodyPr rtlCol="0" anchor="ctr"/>
+          <a:lstStyle/>
+          <a:p>
+            <a:pPr algn="ctr"/>
+            <a:endParaRPr/>
+          </a:p>
+        </p:txBody>
+      </p:sp>
+      <p:sp>
+        <p:nvSpPr>
+          <p:cNvPr id="34" name="Oval 33"/>
+          <p:cNvSpPr/>
+          <p:nvPr/>
+        </p:nvSpPr>
+        <p:spPr>
+          <a:xfrm>
+            <a:off x="5392700" y="2799923"/>
+            <a:ext cx="124358" cy="124358"/>
+          </a:xfrm>
+          <a:prstGeom prst="ellipse">
+            <a:avLst/>
+          </a:prstGeom>
+          <a:solidFill>
+            <a:srgbClr val="2F5B94"/>
+          </a:solidFill>
+          <a:ln>
+            <a:noFill/>
+          </a:ln>
+        </p:spPr>
+        <p:style>
+          <a:lnRef idx="1">
+            <a:schemeClr val="accent1"/>
+          </a:lnRef>
+          <a:fillRef idx="3">
+            <a:schemeClr val="accent1"/>
+          </a:fillRef>
+          <a:effectRef idx="2">
+            <a:schemeClr val="accent1"/>
+          </a:effectRef>
+          <a:fontRef idx="minor">
+            <a:schemeClr val="lt1"/>
+          </a:fontRef>
+        </p:style>
+        <p:txBody>
+          <a:bodyPr rtlCol="0" anchor="ctr"/>
+          <a:lstStyle/>
+          <a:p>
+            <a:pPr algn="ctr"/>
+            <a:endParaRPr/>
+          </a:p>
+        </p:txBody>
+      </p:sp>
+      <p:sp>
+        <p:nvSpPr>
+          <p:cNvPr id="35" name="Oval 34"/>
+          <p:cNvSpPr/>
+          <p:nvPr/>
+        </p:nvSpPr>
+        <p:spPr>
+          <a:xfrm>
+            <a:off x="5366362" y="2476284"/>
+            <a:ext cx="124358" cy="124358"/>
+          </a:xfrm>
+          <a:prstGeom prst="ellipse">
+            <a:avLst/>
+          </a:prstGeom>
+          <a:solidFill>
+            <a:srgbClr val="2F5B94"/>
+          </a:solidFill>
+          <a:ln>
+            <a:noFill/>
+          </a:ln>
+        </p:spPr>
+        <p:style>
+          <a:lnRef idx="1">
+            <a:schemeClr val="accent1"/>
+          </a:lnRef>
+          <a:fillRef idx="3">
+            <a:schemeClr val="accent1"/>
+          </a:fillRef>
+          <a:effectRef idx="2">
+            <a:schemeClr val="accent1"/>
+          </a:effectRef>
+          <a:fontRef idx="minor">
+            <a:schemeClr val="lt1"/>
+          </a:fontRef>
+        </p:style>
+        <p:txBody>
+          <a:bodyPr rtlCol="0" anchor="ctr"/>
+          <a:lstStyle/>
+          <a:p>
+            <a:pPr algn="ctr"/>
+            <a:endParaRPr/>
+          </a:p>
+        </p:txBody>
+      </p:sp>
+      <p:sp>
+        <p:nvSpPr>
+          <p:cNvPr id="36" name="Oval 35"/>
+          <p:cNvSpPr/>
+          <p:nvPr/>
+        </p:nvSpPr>
+        <p:spPr>
+          <a:xfrm>
+            <a:off x="5651791" y="2535987"/>
+            <a:ext cx="124358" cy="124358"/>
+          </a:xfrm>
+          <a:prstGeom prst="ellipse">
+            <a:avLst/>
+          </a:prstGeom>
+          <a:solidFill>
+            <a:srgbClr val="2F5B94"/>
+          </a:solidFill>
+          <a:ln>
+            <a:noFill/>
+          </a:ln>
+        </p:spPr>
+        <p:style>
+          <a:lnRef idx="1">
+            <a:schemeClr val="accent1"/>
+          </a:lnRef>
+          <a:fillRef idx="3">
+            <a:schemeClr val="accent1"/>
+          </a:fillRef>
+          <a:effectRef idx="2">
+            <a:schemeClr val="accent1"/>
+          </a:effectRef>
+          <a:fontRef idx="minor">
+            <a:schemeClr val="lt1"/>
+          </a:fontRef>
+        </p:style>
+        <p:txBody>
+          <a:bodyPr rtlCol="0" anchor="ctr"/>
+          <a:lstStyle/>
+          <a:p>
+            <a:pPr algn="ctr"/>
+            <a:endParaRPr/>
+          </a:p>
+        </p:txBody>
+      </p:sp>
+      <p:cxnSp>
+        <p:nvCxnSpPr>
+          <p:cNvPr id="37" name="Connector 36"/>
+          <p:cNvCxnSpPr/>
+          <p:nvPr/>
+        </p:nvCxnSpPr>
+        <p:spPr>
+          <a:xfrm flipV="1">
+            <a:off x="1470777" y="2009761"/>
+            <a:ext cx="4841705" cy="3648486"/>
+          </a:xfrm>
+          <a:prstGeom prst="line">
+            <a:avLst/>
+          </a:prstGeom>
+          <a:ln w="38100">
+            <a:solidFill>
+              <a:srgbClr val="00897F"/>
+            </a:solidFill>
+            <a:prstDash val="dash"/>
+          </a:ln>
+        </p:spPr>
+        <p:style>
+          <a:lnRef idx="2">
+            <a:schemeClr val="accent1"/>
+          </a:lnRef>
+          <a:fillRef idx="0">
+            <a:schemeClr val="accent1"/>
+          </a:fillRef>
+          <a:effectRef idx="1">
+            <a:schemeClr val="accent1"/>
+          </a:effectRef>
+          <a:fontRef idx="minor">
+            <a:schemeClr val="tx1"/>
+          </a:fontRef>
+        </p:style>
+      </p:cxnSp>
+      <p:cxnSp>
+        <p:nvCxnSpPr>
+          <p:cNvPr id="38" name="Connector 37"/>
+          <p:cNvCxnSpPr/>
+          <p:nvPr/>
+        </p:nvCxnSpPr>
+        <p:spPr>
+          <a:xfrm>
+            <a:off x="3176396" y="2953230"/>
+            <a:ext cx="1364743" cy="1811075"/>
+          </a:xfrm>
+          <a:prstGeom prst="line">
+            <a:avLst/>
+          </a:prstGeom>
+          <a:ln w="38100">
+            <a:solidFill>
+              <a:srgbClr val="D97125"/>
+            </a:solidFill>
+            <a:prstDash val="dash"/>
+          </a:ln>
+        </p:spPr>
+        <p:style>
+          <a:lnRef idx="2">
+            <a:schemeClr val="accent1"/>
+          </a:lnRef>
+          <a:fillRef idx="0">
+            <a:schemeClr val="accent1"/>
+          </a:fillRef>
+          <a:effectRef idx="1">
+            <a:schemeClr val="accent1"/>
+          </a:effectRef>
+          <a:fontRef idx="minor">
+            <a:schemeClr val="tx1"/>
+          </a:fontRef>
+        </p:style>
+      </p:cxnSp>
+      <p:sp>
+        <p:nvSpPr>
+          <p:cNvPr id="39" name="Oval 38"/>
+          <p:cNvSpPr/>
+          <p:nvPr/>
+        </p:nvSpPr>
+        <p:spPr>
+          <a:xfrm>
+            <a:off x="3765499" y="3765499"/>
+            <a:ext cx="186537" cy="186537"/>
+          </a:xfrm>
+          <a:prstGeom prst="ellipse">
+            <a:avLst/>
+          </a:prstGeom>
+          <a:solidFill>
+            <a:srgbClr val="DC3A3F"/>
+          </a:solidFill>
+          <a:ln>
+            <a:solidFill>
+              <a:srgbClr val="FFFFFF"/>
+            </a:solidFill>
+          </a:ln>
+        </p:spPr>
+        <p:style>
+          <a:lnRef idx="1">
+            <a:schemeClr val="accent1"/>
+          </a:lnRef>
+          <a:fillRef idx="3">
+            <a:schemeClr val="accent1"/>
+          </a:fillRef>
+          <a:effectRef idx="2">
+            <a:schemeClr val="accent1"/>
+          </a:effectRef>
+          <a:fontRef idx="minor">
+            <a:schemeClr val="lt1"/>
+          </a:fontRef>
+        </p:style>
+        <p:txBody>
+          <a:bodyPr rtlCol="0" anchor="ctr"/>
+          <a:lstStyle/>
+          <a:p>
+            <a:pPr algn="ctr"/>
+            <a:endParaRPr/>
+          </a:p>
+        </p:txBody>
+      </p:sp>
+      <p:sp>
+        <p:nvSpPr>
+          <p:cNvPr id="40" name="TextBox 39"/>
+          <p:cNvSpPr txBox="1"/>
+          <p:nvPr/>
+        </p:nvSpPr>
+        <p:spPr>
+          <a:xfrm>
+            <a:off x="3968496" y="3959352"/>
+            <a:ext cx="1417320" cy="310896"/>
+          </a:xfrm>
+          <a:prstGeom prst="rect">
+            <a:avLst/>
+          </a:prstGeom>
+          <a:noFill/>
+        </p:spPr>
+        <p:txBody>
+          <a:bodyPr wrap="square">
+            <a:spAutoFit/>
+          </a:bodyPr>
+          <a:lstStyle/>
+          <a:p>
+            <a:pPr>
+              <a:defRPr sz="1200" b="1">
+                <a:solidFill>
+                  <a:srgbClr val="C13A41"/>
+                </a:solidFill>
+                <a:latin typeface="Noto Sans CJK JP"/>
+              </a:defRPr>
+            </a:pPr>
+            <a:r>
+              <a:t>Mean / 平均</a:t>
+            </a:r>
+          </a:p>
+        </p:txBody>
+      </p:sp>
+      <p:sp>
+        <p:nvSpPr>
+          <p:cNvPr id="41" name="TextBox 40"/>
+          <p:cNvSpPr txBox="1"/>
+          <p:nvPr/>
+        </p:nvSpPr>
+        <p:spPr>
+          <a:xfrm>
+            <a:off x="6318504" y="1965960"/>
+            <a:ext cx="685800" cy="274320"/>
+          </a:xfrm>
+          <a:prstGeom prst="rect">
+            <a:avLst/>
+          </a:prstGeom>
+          <a:noFill/>
+        </p:spPr>
+        <p:txBody>
+          <a:bodyPr wrap="square">
+            <a:spAutoFit/>
+          </a:bodyPr>
+          <a:lstStyle/>
+          <a:p>
+            <a:pPr>
+              <a:defRPr sz="1800" b="1">
+                <a:solidFill>
+                  <a:srgbClr val="00897F"/>
+                </a:solidFill>
+                <a:latin typeface="Aptos"/>
+              </a:defRPr>
+            </a:pPr>
+            <a:r>
+              <a:t>PC1</a:t>
+            </a:r>
+          </a:p>
+        </p:txBody>
+      </p:sp>
+      <p:sp>
+        <p:nvSpPr>
+          <p:cNvPr id="42" name="TextBox 41"/>
+          <p:cNvSpPr txBox="1"/>
+          <p:nvPr/>
+        </p:nvSpPr>
+        <p:spPr>
+          <a:xfrm>
+            <a:off x="4297680" y="2633472"/>
+            <a:ext cx="685800" cy="274320"/>
+          </a:xfrm>
+          <a:prstGeom prst="rect">
+            <a:avLst/>
+          </a:prstGeom>
+          <a:noFill/>
+        </p:spPr>
+        <p:txBody>
+          <a:bodyPr wrap="square">
+            <a:spAutoFit/>
+          </a:bodyPr>
+          <a:lstStyle/>
+          <a:p>
+            <a:pPr>
+              <a:defRPr sz="1800" b="1">
+                <a:solidFill>
+                  <a:srgbClr val="D97125"/>
+                </a:solidFill>
+                <a:latin typeface="Aptos"/>
+              </a:defRPr>
+            </a:pPr>
+            <a:r>
+              <a:t>PC2</a:t>
+            </a:r>
+          </a:p>
+        </p:txBody>
+      </p:sp>
+      <p:sp>
+        <p:nvSpPr>
+          <p:cNvPr id="43" name="Rounded Rectangle 42"/>
+          <p:cNvSpPr/>
+          <p:nvPr/>
+        </p:nvSpPr>
+        <p:spPr>
+          <a:xfrm>
+            <a:off x="7607808" y="1435608"/>
+            <a:ext cx="4069080" cy="4498848"/>
+          </a:xfrm>
+          <a:prstGeom prst="roundRect">
+            <a:avLst/>
+          </a:prstGeom>
+          <a:solidFill>
+            <a:srgbClr val="ECF3FA"/>
+          </a:solidFill>
+          <a:ln>
+            <a:noFill/>
+          </a:ln>
+        </p:spPr>
+        <p:style>
+          <a:lnRef idx="1">
+            <a:schemeClr val="accent1"/>
+          </a:lnRef>
+          <a:fillRef idx="3">
+            <a:schemeClr val="accent1"/>
+          </a:fillRef>
+          <a:effectRef idx="2">
+            <a:schemeClr val="accent1"/>
+          </a:effectRef>
+          <a:fontRef idx="minor">
+            <a:schemeClr val="lt1"/>
+          </a:fontRef>
+        </p:style>
+        <p:txBody>
+          <a:bodyPr rtlCol="0" anchor="ctr"/>
+          <a:lstStyle/>
+          <a:p>
+            <a:pPr algn="ctr"/>
+            <a:endParaRPr/>
+          </a:p>
+        </p:txBody>
+      </p:sp>
+      <p:sp>
+        <p:nvSpPr>
+          <p:cNvPr id="44" name="TextBox 43"/>
+          <p:cNvSpPr txBox="1"/>
+          <p:nvPr/>
+        </p:nvSpPr>
+        <p:spPr>
+          <a:xfrm>
+            <a:off x="7927848" y="1792224"/>
+            <a:ext cx="3383280" cy="365760"/>
+          </a:xfrm>
+          <a:prstGeom prst="rect">
+            <a:avLst/>
+          </a:prstGeom>
+          <a:noFill/>
+        </p:spPr>
+        <p:txBody>
+          <a:bodyPr wrap="square">
+            <a:spAutoFit/>
+          </a:bodyPr>
+          <a:lstStyle/>
+          <a:p>
+            <a:pPr>
+              <a:defRPr sz="1900" b="1">
+                <a:solidFill>
+                  <a:srgbClr val="1B2F4B"/>
+                </a:solidFill>
+                <a:latin typeface="Aptos"/>
+              </a:defRPr>
+            </a:pPr>
+            <a:r>
+              <a:t>PC1: greatest variance</a:t>
+            </a:r>
+          </a:p>
+        </p:txBody>
+      </p:sp>
+      <p:sp>
+        <p:nvSpPr>
+          <p:cNvPr id="45" name="TextBox 44"/>
+          <p:cNvSpPr txBox="1"/>
+          <p:nvPr/>
+        </p:nvSpPr>
+        <p:spPr>
+          <a:xfrm>
+            <a:off x="7936992" y="2221992"/>
+            <a:ext cx="3520440" cy="548640"/>
+          </a:xfrm>
+          <a:prstGeom prst="rect">
+            <a:avLst/>
+          </a:prstGeom>
+          <a:noFill/>
+        </p:spPr>
+        <p:txBody>
+          <a:bodyPr wrap="square">
+            <a:spAutoFit/>
+          </a:bodyPr>
+          <a:lstStyle/>
+          <a:p>
+            <a:pPr>
+              <a:defRPr sz="1400" b="0">
+                <a:solidFill>
+                  <a:srgbClr val="2F5B94"/>
+                </a:solidFill>
+                <a:latin typeface="Noto Sans CJK JP"/>
+              </a:defRPr>
+            </a:pPr>
+            <a:r>
+              <a:t>第1主成分：分散が最大の方向</a:t>
+            </a:r>
+          </a:p>
+        </p:txBody>
+      </p:sp>
+      <p:cxnSp>
+        <p:nvCxnSpPr>
+          <p:cNvPr id="46" name="Connector 45"/>
+          <p:cNvCxnSpPr/>
+          <p:nvPr/>
+        </p:nvCxnSpPr>
+        <p:spPr>
+          <a:xfrm>
+            <a:off x="7946136" y="2889504"/>
+            <a:ext cx="3346704" cy="0"/>
+          </a:xfrm>
+          <a:prstGeom prst="line">
+            <a:avLst/>
+          </a:prstGeom>
+          <a:ln w="12700">
+            <a:solidFill>
+              <a:srgbClr val="D5E2EE"/>
+            </a:solidFill>
+          </a:ln>
+        </p:spPr>
+        <p:style>
+          <a:lnRef idx="2">
+            <a:schemeClr val="accent1"/>
+          </a:lnRef>
+          <a:fillRef idx="0">
+            <a:schemeClr val="accent1"/>
+          </a:fillRef>
+          <a:effectRef idx="1">
+            <a:schemeClr val="accent1"/>
+          </a:effectRef>
+          <a:fontRef idx="minor">
+            <a:schemeClr val="tx1"/>
+          </a:fontRef>
+        </p:style>
+      </p:cxnSp>
+      <p:sp>
+        <p:nvSpPr>
+          <p:cNvPr id="47" name="TextBox 46"/>
+          <p:cNvSpPr txBox="1"/>
+          <p:nvPr/>
+        </p:nvSpPr>
+        <p:spPr>
+          <a:xfrm>
+            <a:off x="7927848" y="3136392"/>
+            <a:ext cx="3502152" cy="502920"/>
+          </a:xfrm>
+          <a:prstGeom prst="rect">
+            <a:avLst/>
+          </a:prstGeom>
+          <a:noFill/>
+        </p:spPr>
+        <p:txBody>
+          <a:bodyPr wrap="square">
+            <a:spAutoFit/>
+          </a:bodyPr>
+          <a:lstStyle/>
+          <a:p>
+            <a:pPr>
+              <a:defRPr sz="1700" b="1">
+                <a:solidFill>
+                  <a:srgbClr val="1B2F4B"/>
+                </a:solidFill>
+                <a:latin typeface="Aptos"/>
+              </a:defRPr>
+            </a:pPr>
+            <a:r>
+              <a:t>PC2: perpendicular to PC1</a:t>
+            </a:r>
+          </a:p>
+        </p:txBody>
+      </p:sp>
+      <p:sp>
+        <p:nvSpPr>
+          <p:cNvPr id="48" name="TextBox 47"/>
+          <p:cNvSpPr txBox="1"/>
+          <p:nvPr/>
+        </p:nvSpPr>
+        <p:spPr>
+          <a:xfrm>
+            <a:off x="7936992" y="3703320"/>
+            <a:ext cx="3493008" cy="603504"/>
+          </a:xfrm>
+          <a:prstGeom prst="rect">
+            <a:avLst/>
+          </a:prstGeom>
+          <a:noFill/>
+        </p:spPr>
+        <p:txBody>
+          <a:bodyPr wrap="square">
+            <a:spAutoFit/>
+          </a:bodyPr>
+          <a:lstStyle/>
+          <a:p>
+            <a:pPr>
+              <a:defRPr sz="1400" b="0">
+                <a:solidFill>
+                  <a:srgbClr val="2F5B94"/>
+                </a:solidFill>
+                <a:latin typeface="Noto Sans CJK JP"/>
+              </a:defRPr>
+            </a:pPr>
+            <a:r>
+              <a:t>第2主成分：PC1と直交する方向</a:t>
+            </a:r>
+          </a:p>
+        </p:txBody>
+      </p:sp>
+      <p:cxnSp>
+        <p:nvCxnSpPr>
+          <p:cNvPr id="49" name="Connector 48"/>
+          <p:cNvCxnSpPr/>
+          <p:nvPr/>
+        </p:nvCxnSpPr>
+        <p:spPr>
+          <a:xfrm>
+            <a:off x="7946136" y="4489704"/>
+            <a:ext cx="3346704" cy="0"/>
+          </a:xfrm>
+          <a:prstGeom prst="line">
+            <a:avLst/>
+          </a:prstGeom>
+          <a:ln w="12700">
+            <a:solidFill>
+              <a:srgbClr val="D5E2EE"/>
+            </a:solidFill>
+          </a:ln>
+        </p:spPr>
+        <p:style>
+          <a:lnRef idx="2">
+            <a:schemeClr val="accent1"/>
+          </a:lnRef>
+          <a:fillRef idx="0">
+            <a:schemeClr val="accent1"/>
+          </a:fillRef>
+          <a:effectRef idx="1">
+            <a:schemeClr val="accent1"/>
+          </a:effectRef>
+          <a:fontRef idx="minor">
+            <a:schemeClr val="tx1"/>
+          </a:fontRef>
+        </p:style>
+      </p:cxnSp>
+      <p:sp>
+        <p:nvSpPr>
+          <p:cNvPr id="50" name="TextBox 49"/>
+          <p:cNvSpPr txBox="1"/>
+          <p:nvPr/>
+        </p:nvSpPr>
+        <p:spPr>
+          <a:xfrm>
+            <a:off x="7927848" y="4745736"/>
+            <a:ext cx="3429000" cy="411480"/>
+          </a:xfrm>
+          <a:prstGeom prst="rect">
+            <a:avLst/>
+          </a:prstGeom>
+          <a:noFill/>
+        </p:spPr>
+        <p:txBody>
+          <a:bodyPr wrap="square">
+            <a:spAutoFit/>
+          </a:bodyPr>
+          <a:lstStyle/>
+          <a:p>
+            <a:pPr>
+              <a:defRPr sz="1400" b="1">
+                <a:solidFill>
+                  <a:srgbClr val="1B2F4B"/>
+                </a:solidFill>
+                <a:latin typeface="Aptos"/>
+              </a:defRPr>
+            </a:pPr>
+            <a:r>
+              <a:t>Both axes pass through the data mean.</a:t>
+            </a:r>
+          </a:p>
+        </p:txBody>
+      </p:sp>
+      <p:sp>
+        <p:nvSpPr>
+          <p:cNvPr id="51" name="TextBox 50"/>
+          <p:cNvSpPr txBox="1"/>
+          <p:nvPr/>
+        </p:nvSpPr>
+        <p:spPr>
+          <a:xfrm>
+            <a:off x="7936992" y="5184648"/>
+            <a:ext cx="3520440" cy="475488"/>
+          </a:xfrm>
+          <a:prstGeom prst="rect">
+            <a:avLst/>
+          </a:prstGeom>
+          <a:noFill/>
+        </p:spPr>
+        <p:txBody>
+          <a:bodyPr wrap="square">
+            <a:spAutoFit/>
+          </a:bodyPr>
+          <a:lstStyle/>
+          <a:p>
+            <a:pPr>
+              <a:defRPr sz="1200" b="0">
+                <a:solidFill>
+                  <a:srgbClr val="2F5B94"/>
+                </a:solidFill>
+                <a:latin typeface="Noto Sans CJK JP"/>
+              </a:defRPr>
+            </a:pPr>
+            <a:r>
+              <a:t>両方の軸はデータの平均点を通ります。</a:t>
+            </a:r>
+          </a:p>
+        </p:txBody>
+      </p:sp>
+      <p:sp>
+        <p:nvSpPr>
+          <p:cNvPr id="52" name="Rounded Rectangle 51"/>
+          <p:cNvSpPr/>
+          <p:nvPr/>
+        </p:nvSpPr>
+        <p:spPr>
+          <a:xfrm>
+            <a:off x="530352" y="6099048"/>
+            <a:ext cx="11155680" cy="448056"/>
+          </a:xfrm>
+          <a:prstGeom prst="roundRect">
+            <a:avLst/>
+          </a:prstGeom>
+          <a:solidFill>
+            <a:srgbClr val="E1F4EE"/>
+          </a:solidFill>
+          <a:ln>
+            <a:noFill/>
+          </a:ln>
+        </p:spPr>
+        <p:style>
+          <a:lnRef idx="1">
+            <a:schemeClr val="accent1"/>
+          </a:lnRef>
+          <a:fillRef idx="3">
+            <a:schemeClr val="accent1"/>
+          </a:fillRef>
+          <a:effectRef idx="2">
+            <a:schemeClr val="accent1"/>
+          </a:effectRef>
+          <a:fontRef idx="minor">
+            <a:schemeClr val="lt1"/>
+          </a:fontRef>
+        </p:style>
+        <p:txBody>
+          <a:bodyPr rtlCol="0" anchor="ctr"/>
+          <a:lstStyle/>
+          <a:p>
+            <a:pPr algn="ctr"/>
+            <a:endParaRPr/>
+          </a:p>
+        </p:txBody>
+      </p:sp>
+      <p:sp>
+        <p:nvSpPr>
+          <p:cNvPr id="53" name="TextBox 52"/>
+          <p:cNvSpPr txBox="1"/>
+          <p:nvPr/>
+        </p:nvSpPr>
+        <p:spPr>
+          <a:xfrm>
+            <a:off x="722376" y="6190488"/>
+            <a:ext cx="10789920" cy="274320"/>
+          </a:xfrm>
+          <a:prstGeom prst="rect">
+            <a:avLst/>
+          </a:prstGeom>
+          <a:noFill/>
+        </p:spPr>
+        <p:txBody>
+          <a:bodyPr wrap="square">
+            <a:spAutoFit/>
+          </a:bodyPr>
+          <a:lstStyle/>
+          <a:p>
+            <a:pPr>
+              <a:defRPr sz="1300" b="1">
+                <a:solidFill>
+                  <a:srgbClr val="1B2F4B"/>
+                </a:solidFill>
+                <a:latin typeface="Noto Sans CJK JP"/>
+              </a:defRPr>
+            </a:pPr>
+            <a:r>
+              <a:t>PCA changes coordinates, not the underlying data. / PCAは座標の表現を変えるだけで、元のデータを変えません。</a:t>
+            </a:r>
+          </a:p>
+        </p:txBody>
+      </p:sp>
+      <p:sp>
+        <p:nvSpPr>
+          <p:cNvPr id="56" name="Text 4">
+            <a:extLst>
+              <a:ext uri="{FF2B5EF4-FFF2-40B4-BE49-F238E27FC236}">
+                <a16:creationId xmlns:a16="http://schemas.microsoft.com/office/drawing/2014/main" id="{8EF94088-6FB7-7408-6E5A-E689D27A8455}"/>
+              </a:ext>
+            </a:extLst>
+          </p:cNvPr>
+          <p:cNvSpPr/>
+          <p:nvPr/>
+        </p:nvSpPr>
+        <p:spPr>
+          <a:xfrm>
+            <a:off x="484632" y="6528816"/>
+            <a:ext cx="5486400" cy="173736"/>
+          </a:xfrm>
+          <a:prstGeom prst="rect">
+            <a:avLst/>
+          </a:prstGeom>
+          <a:noFill/>
+          <a:ln/>
+        </p:spPr>
+        <p:txBody>
+          <a:bodyPr wrap="square" lIns="445" tIns="445" rIns="445" bIns="445" rtlCol="0" anchor="ctr"/>
+          <a:lstStyle/>
+          <a:p>
+            <a:pPr marL="0" indent="0">
+              <a:buNone/>
+            </a:pPr>
+            <a:r>
+              <a:rPr lang="en-US" sz="900" dirty="0">
+                <a:solidFill>
+                  <a:srgbClr val="50677D"/>
                 </a:solidFill>
                 <a:latin typeface="Aptos" pitchFamily="34" charset="0"/>
                 <a:ea typeface="Aptos" pitchFamily="34" charset="-122"/>
                 <a:cs typeface="Aptos" pitchFamily="34" charset="-120"/>
               </a:rPr>
-              <a:t>PCA intuition: rotate the axes</a:t>
-            </a:r>
-            <a:endParaRPr lang="en-US" sz="2500" dirty="0"/>
-          </a:p>
-        </p:txBody>
-      </p:sp>
-      <p:sp>
-        <p:nvSpPr>
-          <p:cNvPr id="4" name="Text 2"/>
-          <p:cNvSpPr/>
-          <p:nvPr/>
-        </p:nvSpPr>
-        <p:spPr>
-          <a:xfrm>
-            <a:off x="475488" y="777240"/>
-            <a:ext cx="11109960" cy="320040"/>
-          </a:xfrm>
-          <a:prstGeom prst="rect">
-            <a:avLst/>
-          </a:prstGeom>
-          <a:noFill/>
-          <a:ln/>
-        </p:spPr>
-        <p:txBody>
-          <a:bodyPr wrap="square" lIns="445" tIns="445" rIns="445" bIns="445" rtlCol="0" anchor="ctr"/>
-          <a:lstStyle/>
-          <a:p>
-            <a:pPr marL="0" indent="0">
-              <a:buNone/>
-            </a:pPr>
-            <a:r>
-              <a:rPr lang="en-US" sz="1600" dirty="0">
-                <a:solidFill>
-                  <a:srgbClr val="235D91"/>
-                </a:solidFill>
-                <a:latin typeface="Noto Sans CJK JP" pitchFamily="34" charset="0"/>
-                <a:ea typeface="Noto Sans CJK JP" pitchFamily="34" charset="-122"/>
-                <a:cs typeface="Noto Sans CJK JP" pitchFamily="34" charset="-120"/>
-              </a:rPr>
-              <a:t>PCAの直感：座標軸を回転させる</a:t>
-            </a:r>
-            <a:endParaRPr lang="en-US" sz="1600" dirty="0"/>
-          </a:p>
-        </p:txBody>
-      </p:sp>
-      <p:sp>
-        <p:nvSpPr>
-          <p:cNvPr id="5" name="Shape 3"/>
-          <p:cNvSpPr/>
-          <p:nvPr/>
-        </p:nvSpPr>
-        <p:spPr>
-          <a:xfrm>
-            <a:off x="475488" y="1207008"/>
-            <a:ext cx="11247120" cy="0"/>
-          </a:xfrm>
-          <a:prstGeom prst="line">
-            <a:avLst/>
-          </a:prstGeom>
-          <a:noFill/>
-          <a:ln w="12700">
-            <a:solidFill>
-              <a:srgbClr val="D6E2EC"/>
-            </a:solidFill>
-            <a:prstDash val="solid"/>
-          </a:ln>
-        </p:spPr>
-        <p:txBody>
-          <a:bodyPr/>
-          <a:lstStyle/>
-          <a:p>
-            <a:endParaRPr lang="en-JP"/>
-          </a:p>
-        </p:txBody>
-      </p:sp>
-      <p:sp>
-        <p:nvSpPr>
-          <p:cNvPr id="6" name="Text 4"/>
-          <p:cNvSpPr/>
-          <p:nvPr/>
-        </p:nvSpPr>
-        <p:spPr>
-          <a:xfrm>
-            <a:off x="484632" y="6528816"/>
-            <a:ext cx="5486400" cy="173736"/>
-          </a:xfrm>
-          <a:prstGeom prst="rect">
-            <a:avLst/>
-          </a:prstGeom>
-          <a:noFill/>
-          <a:ln/>
-        </p:spPr>
-        <p:txBody>
-          <a:bodyPr wrap="square" lIns="445" tIns="445" rIns="445" bIns="445" rtlCol="0" anchor="ctr"/>
-          <a:lstStyle/>
-          <a:p>
-            <a:pPr marL="0" indent="0">
-              <a:buNone/>
-            </a:pPr>
-            <a:r>
-              <a:rPr lang="en-US" sz="900" dirty="0">
-                <a:solidFill>
-                  <a:srgbClr val="50677D"/>
-                </a:solidFill>
-                <a:latin typeface="Aptos" pitchFamily="34" charset="0"/>
-                <a:ea typeface="Aptos" pitchFamily="34" charset="-122"/>
-                <a:cs typeface="Aptos" pitchFamily="34" charset="-120"/>
-              </a:rPr>
               <a:t>EIGENFACES · PCA  |  固有顔・主成分分析</a:t>
             </a:r>
             <a:endParaRPr lang="en-US" sz="900" dirty="0"/>
-          </a:p>
-        </p:txBody>
-      </p:sp>
-      <p:sp>
-        <p:nvSpPr>
-          <p:cNvPr id="8" name="Text 6"/>
-          <p:cNvSpPr/>
-          <p:nvPr/>
-        </p:nvSpPr>
-        <p:spPr>
-          <a:xfrm>
-            <a:off x="11731752" y="6519672"/>
-            <a:ext cx="310896" cy="173736"/>
-          </a:xfrm>
-          <a:prstGeom prst="rect">
-            <a:avLst/>
-          </a:prstGeom>
-          <a:noFill/>
-          <a:ln/>
-        </p:spPr>
-        <p:txBody>
-          <a:bodyPr wrap="square" lIns="445" tIns="445" rIns="445" bIns="445" rtlCol="0" anchor="ctr"/>
-          <a:lstStyle/>
-          <a:p>
-            <a:pPr marL="0" indent="0">
-              <a:buNone/>
-            </a:pPr>
-            <a:r>
-              <a:rPr lang="en-US" sz="900" b="1" dirty="0">
-                <a:solidFill>
-                  <a:srgbClr val="0D817E"/>
-                </a:solidFill>
-                <a:latin typeface="Aptos" pitchFamily="34" charset="0"/>
-                <a:ea typeface="Aptos" pitchFamily="34" charset="-122"/>
-                <a:cs typeface="Aptos" pitchFamily="34" charset="-120"/>
-              </a:rPr>
-              <a:t>10</a:t>
-            </a:r>
-            <a:endParaRPr lang="en-US" sz="900" dirty="0"/>
-          </a:p>
-        </p:txBody>
-      </p:sp>
-      <p:sp>
-        <p:nvSpPr>
-          <p:cNvPr id="9" name="Shape 7"/>
-          <p:cNvSpPr/>
-          <p:nvPr/>
-        </p:nvSpPr>
-        <p:spPr>
-          <a:xfrm>
-            <a:off x="941832" y="5303520"/>
-            <a:ext cx="4590288" cy="0"/>
-          </a:xfrm>
-          <a:prstGeom prst="line">
-            <a:avLst/>
-          </a:prstGeom>
-          <a:noFill/>
-          <a:ln w="20320">
-            <a:solidFill>
-              <a:srgbClr val="50677D"/>
-            </a:solidFill>
-            <a:prstDash val="solid"/>
-          </a:ln>
-        </p:spPr>
-        <p:txBody>
-          <a:bodyPr/>
-          <a:lstStyle/>
-          <a:p>
-            <a:endParaRPr lang="en-JP"/>
-          </a:p>
-        </p:txBody>
-      </p:sp>
-      <p:sp>
-        <p:nvSpPr>
-          <p:cNvPr id="10" name="Shape 8"/>
-          <p:cNvSpPr/>
-          <p:nvPr/>
-        </p:nvSpPr>
-        <p:spPr>
-          <a:xfrm>
-            <a:off x="1152144" y="5541264"/>
-            <a:ext cx="0" cy="0"/>
-          </a:xfrm>
-          <a:prstGeom prst="line">
-            <a:avLst/>
-          </a:prstGeom>
-          <a:noFill/>
-          <a:ln w="20320">
-            <a:solidFill>
-              <a:srgbClr val="50677D"/>
-            </a:solidFill>
-            <a:prstDash val="solid"/>
-          </a:ln>
-        </p:spPr>
-        <p:txBody>
-          <a:bodyPr/>
-          <a:lstStyle/>
-          <a:p>
-            <a:endParaRPr lang="en-JP"/>
-          </a:p>
-        </p:txBody>
-      </p:sp>
-      <p:sp>
-        <p:nvSpPr>
-          <p:cNvPr id="11" name="Shape 9"/>
-          <p:cNvSpPr/>
-          <p:nvPr/>
-        </p:nvSpPr>
-        <p:spPr>
-          <a:xfrm>
-            <a:off x="1636776" y="4617720"/>
-            <a:ext cx="118872" cy="118872"/>
-          </a:xfrm>
-          <a:prstGeom prst="ellipse">
-            <a:avLst/>
-          </a:prstGeom>
-          <a:solidFill>
-            <a:srgbClr val="235D91"/>
-          </a:solidFill>
-          <a:ln w="12700">
-            <a:solidFill>
-              <a:srgbClr val="235D91"/>
-            </a:solidFill>
-            <a:prstDash val="solid"/>
-          </a:ln>
-        </p:spPr>
-        <p:txBody>
-          <a:bodyPr/>
-          <a:lstStyle/>
-          <a:p>
-            <a:endParaRPr lang="en-JP"/>
-          </a:p>
-        </p:txBody>
-      </p:sp>
-      <p:sp>
-        <p:nvSpPr>
-          <p:cNvPr id="12" name="Shape 10"/>
-          <p:cNvSpPr/>
-          <p:nvPr/>
-        </p:nvSpPr>
-        <p:spPr>
-          <a:xfrm>
-            <a:off x="1901952" y="4434840"/>
-            <a:ext cx="118872" cy="118872"/>
-          </a:xfrm>
-          <a:prstGeom prst="ellipse">
-            <a:avLst/>
-          </a:prstGeom>
-          <a:solidFill>
-            <a:srgbClr val="235D91"/>
-          </a:solidFill>
-          <a:ln w="12700">
-            <a:solidFill>
-              <a:srgbClr val="235D91"/>
-            </a:solidFill>
-            <a:prstDash val="solid"/>
-          </a:ln>
-        </p:spPr>
-        <p:txBody>
-          <a:bodyPr/>
-          <a:lstStyle/>
-          <a:p>
-            <a:endParaRPr lang="en-JP"/>
-          </a:p>
-        </p:txBody>
-      </p:sp>
-      <p:sp>
-        <p:nvSpPr>
-          <p:cNvPr id="13" name="Shape 11"/>
-          <p:cNvSpPr/>
-          <p:nvPr/>
-        </p:nvSpPr>
-        <p:spPr>
-          <a:xfrm>
-            <a:off x="2167128" y="4251960"/>
-            <a:ext cx="118872" cy="118872"/>
-          </a:xfrm>
-          <a:prstGeom prst="ellipse">
-            <a:avLst/>
-          </a:prstGeom>
-          <a:solidFill>
-            <a:srgbClr val="235D91"/>
-          </a:solidFill>
-          <a:ln w="12700">
-            <a:solidFill>
-              <a:srgbClr val="235D91"/>
-            </a:solidFill>
-            <a:prstDash val="solid"/>
-          </a:ln>
-        </p:spPr>
-        <p:txBody>
-          <a:bodyPr/>
-          <a:lstStyle/>
-          <a:p>
-            <a:endParaRPr lang="en-JP"/>
-          </a:p>
-        </p:txBody>
-      </p:sp>
-      <p:sp>
-        <p:nvSpPr>
-          <p:cNvPr id="14" name="Shape 12"/>
-          <p:cNvSpPr/>
-          <p:nvPr/>
-        </p:nvSpPr>
-        <p:spPr>
-          <a:xfrm>
-            <a:off x="2432304" y="4069080"/>
-            <a:ext cx="118872" cy="118872"/>
-          </a:xfrm>
-          <a:prstGeom prst="ellipse">
-            <a:avLst/>
-          </a:prstGeom>
-          <a:solidFill>
-            <a:srgbClr val="235D91"/>
-          </a:solidFill>
-          <a:ln w="12700">
-            <a:solidFill>
-              <a:srgbClr val="235D91"/>
-            </a:solidFill>
-            <a:prstDash val="solid"/>
-          </a:ln>
-        </p:spPr>
-        <p:txBody>
-          <a:bodyPr/>
-          <a:lstStyle/>
-          <a:p>
-            <a:endParaRPr lang="en-JP"/>
-          </a:p>
-        </p:txBody>
-      </p:sp>
-      <p:sp>
-        <p:nvSpPr>
-          <p:cNvPr id="15" name="Shape 13"/>
-          <p:cNvSpPr/>
-          <p:nvPr/>
-        </p:nvSpPr>
-        <p:spPr>
-          <a:xfrm>
-            <a:off x="2697480" y="3886200"/>
-            <a:ext cx="118872" cy="118872"/>
-          </a:xfrm>
-          <a:prstGeom prst="ellipse">
-            <a:avLst/>
-          </a:prstGeom>
-          <a:solidFill>
-            <a:srgbClr val="235D91"/>
-          </a:solidFill>
-          <a:ln w="12700">
-            <a:solidFill>
-              <a:srgbClr val="235D91"/>
-            </a:solidFill>
-            <a:prstDash val="solid"/>
-          </a:ln>
-        </p:spPr>
-        <p:txBody>
-          <a:bodyPr/>
-          <a:lstStyle/>
-          <a:p>
-            <a:endParaRPr lang="en-JP"/>
-          </a:p>
-        </p:txBody>
-      </p:sp>
-      <p:sp>
-        <p:nvSpPr>
-          <p:cNvPr id="16" name="Shape 14"/>
-          <p:cNvSpPr/>
-          <p:nvPr/>
-        </p:nvSpPr>
-        <p:spPr>
-          <a:xfrm>
-            <a:off x="2962656" y="3703320"/>
-            <a:ext cx="118872" cy="118872"/>
-          </a:xfrm>
-          <a:prstGeom prst="ellipse">
-            <a:avLst/>
-          </a:prstGeom>
-          <a:solidFill>
-            <a:srgbClr val="235D91"/>
-          </a:solidFill>
-          <a:ln w="12700">
-            <a:solidFill>
-              <a:srgbClr val="235D91"/>
-            </a:solidFill>
-            <a:prstDash val="solid"/>
-          </a:ln>
-        </p:spPr>
-        <p:txBody>
-          <a:bodyPr/>
-          <a:lstStyle/>
-          <a:p>
-            <a:endParaRPr lang="en-JP"/>
-          </a:p>
-        </p:txBody>
-      </p:sp>
-      <p:sp>
-        <p:nvSpPr>
-          <p:cNvPr id="17" name="Shape 15"/>
-          <p:cNvSpPr/>
-          <p:nvPr/>
-        </p:nvSpPr>
-        <p:spPr>
-          <a:xfrm>
-            <a:off x="3227832" y="3520440"/>
-            <a:ext cx="118872" cy="118872"/>
-          </a:xfrm>
-          <a:prstGeom prst="ellipse">
-            <a:avLst/>
-          </a:prstGeom>
-          <a:solidFill>
-            <a:srgbClr val="235D91"/>
-          </a:solidFill>
-          <a:ln w="12700">
-            <a:solidFill>
-              <a:srgbClr val="235D91"/>
-            </a:solidFill>
-            <a:prstDash val="solid"/>
-          </a:ln>
-        </p:spPr>
-        <p:txBody>
-          <a:bodyPr/>
-          <a:lstStyle/>
-          <a:p>
-            <a:endParaRPr lang="en-JP"/>
-          </a:p>
-        </p:txBody>
-      </p:sp>
-      <p:sp>
-        <p:nvSpPr>
-          <p:cNvPr id="18" name="Shape 16"/>
-          <p:cNvSpPr/>
-          <p:nvPr/>
-        </p:nvSpPr>
-        <p:spPr>
-          <a:xfrm>
-            <a:off x="3493008" y="3337560"/>
-            <a:ext cx="118872" cy="118872"/>
-          </a:xfrm>
-          <a:prstGeom prst="ellipse">
-            <a:avLst/>
-          </a:prstGeom>
-          <a:solidFill>
-            <a:srgbClr val="235D91"/>
-          </a:solidFill>
-          <a:ln w="12700">
-            <a:solidFill>
-              <a:srgbClr val="235D91"/>
-            </a:solidFill>
-            <a:prstDash val="solid"/>
-          </a:ln>
-        </p:spPr>
-        <p:txBody>
-          <a:bodyPr/>
-          <a:lstStyle/>
-          <a:p>
-            <a:endParaRPr lang="en-JP"/>
-          </a:p>
-        </p:txBody>
-      </p:sp>
-      <p:sp>
-        <p:nvSpPr>
-          <p:cNvPr id="19" name="Shape 17"/>
-          <p:cNvSpPr/>
-          <p:nvPr/>
-        </p:nvSpPr>
-        <p:spPr>
-          <a:xfrm>
-            <a:off x="3758184" y="3154680"/>
-            <a:ext cx="118872" cy="118872"/>
-          </a:xfrm>
-          <a:prstGeom prst="ellipse">
-            <a:avLst/>
-          </a:prstGeom>
-          <a:solidFill>
-            <a:srgbClr val="235D91"/>
-          </a:solidFill>
-          <a:ln w="12700">
-            <a:solidFill>
-              <a:srgbClr val="235D91"/>
-            </a:solidFill>
-            <a:prstDash val="solid"/>
-          </a:ln>
-        </p:spPr>
-        <p:txBody>
-          <a:bodyPr/>
-          <a:lstStyle/>
-          <a:p>
-            <a:endParaRPr lang="en-JP"/>
-          </a:p>
-        </p:txBody>
-      </p:sp>
-      <p:sp>
-        <p:nvSpPr>
-          <p:cNvPr id="20" name="Shape 18"/>
-          <p:cNvSpPr/>
-          <p:nvPr/>
-        </p:nvSpPr>
-        <p:spPr>
-          <a:xfrm>
-            <a:off x="4023360" y="2971800"/>
-            <a:ext cx="118872" cy="118872"/>
-          </a:xfrm>
-          <a:prstGeom prst="ellipse">
-            <a:avLst/>
-          </a:prstGeom>
-          <a:solidFill>
-            <a:srgbClr val="235D91"/>
-          </a:solidFill>
-          <a:ln w="12700">
-            <a:solidFill>
-              <a:srgbClr val="235D91"/>
-            </a:solidFill>
-            <a:prstDash val="solid"/>
-          </a:ln>
-        </p:spPr>
-        <p:txBody>
-          <a:bodyPr/>
-          <a:lstStyle/>
-          <a:p>
-            <a:endParaRPr lang="en-JP"/>
-          </a:p>
-        </p:txBody>
-      </p:sp>
-      <p:sp>
-        <p:nvSpPr>
-          <p:cNvPr id="21" name="Shape 19"/>
-          <p:cNvSpPr/>
-          <p:nvPr/>
-        </p:nvSpPr>
-        <p:spPr>
-          <a:xfrm>
-            <a:off x="4288536" y="2788920"/>
-            <a:ext cx="118872" cy="118872"/>
-          </a:xfrm>
-          <a:prstGeom prst="ellipse">
-            <a:avLst/>
-          </a:prstGeom>
-          <a:solidFill>
-            <a:srgbClr val="235D91"/>
-          </a:solidFill>
-          <a:ln w="12700">
-            <a:solidFill>
-              <a:srgbClr val="235D91"/>
-            </a:solidFill>
-            <a:prstDash val="solid"/>
-          </a:ln>
-        </p:spPr>
-        <p:txBody>
-          <a:bodyPr/>
-          <a:lstStyle/>
-          <a:p>
-            <a:endParaRPr lang="en-JP"/>
-          </a:p>
-        </p:txBody>
-      </p:sp>
-      <p:sp>
-        <p:nvSpPr>
-          <p:cNvPr id="22" name="Shape 20"/>
-          <p:cNvSpPr/>
-          <p:nvPr/>
-        </p:nvSpPr>
-        <p:spPr>
-          <a:xfrm>
-            <a:off x="4553712" y="2606040"/>
-            <a:ext cx="118872" cy="118872"/>
-          </a:xfrm>
-          <a:prstGeom prst="ellipse">
-            <a:avLst/>
-          </a:prstGeom>
-          <a:solidFill>
-            <a:srgbClr val="235D91"/>
-          </a:solidFill>
-          <a:ln w="12700">
-            <a:solidFill>
-              <a:srgbClr val="235D91"/>
-            </a:solidFill>
-            <a:prstDash val="solid"/>
-          </a:ln>
-        </p:spPr>
-        <p:txBody>
-          <a:bodyPr/>
-          <a:lstStyle/>
-          <a:p>
-            <a:endParaRPr lang="en-JP"/>
-          </a:p>
-        </p:txBody>
-      </p:sp>
-      <p:sp>
-        <p:nvSpPr>
-          <p:cNvPr id="23" name="Shape 21"/>
-          <p:cNvSpPr/>
-          <p:nvPr/>
-        </p:nvSpPr>
-        <p:spPr>
-          <a:xfrm>
-            <a:off x="4818888" y="2423160"/>
-            <a:ext cx="118872" cy="118872"/>
-          </a:xfrm>
-          <a:prstGeom prst="ellipse">
-            <a:avLst/>
-          </a:prstGeom>
-          <a:solidFill>
-            <a:srgbClr val="235D91"/>
-          </a:solidFill>
-          <a:ln w="12700">
-            <a:solidFill>
-              <a:srgbClr val="235D91"/>
-            </a:solidFill>
-            <a:prstDash val="solid"/>
-          </a:ln>
-        </p:spPr>
-        <p:txBody>
-          <a:bodyPr/>
-          <a:lstStyle/>
-          <a:p>
-            <a:endParaRPr lang="en-JP"/>
-          </a:p>
-        </p:txBody>
-      </p:sp>
-      <p:sp>
-        <p:nvSpPr>
-          <p:cNvPr id="24" name="Shape 22"/>
-          <p:cNvSpPr/>
-          <p:nvPr/>
-        </p:nvSpPr>
-        <p:spPr>
-          <a:xfrm>
-            <a:off x="1636776" y="5056632"/>
-            <a:ext cx="118872" cy="118872"/>
-          </a:xfrm>
-          <a:prstGeom prst="ellipse">
-            <a:avLst/>
-          </a:prstGeom>
-          <a:solidFill>
-            <a:srgbClr val="235D91"/>
-          </a:solidFill>
-          <a:ln w="12700">
-            <a:solidFill>
-              <a:srgbClr val="235D91"/>
-            </a:solidFill>
-            <a:prstDash val="solid"/>
-          </a:ln>
-        </p:spPr>
-        <p:txBody>
-          <a:bodyPr/>
-          <a:lstStyle/>
-          <a:p>
-            <a:endParaRPr lang="en-JP"/>
-          </a:p>
-        </p:txBody>
-      </p:sp>
-      <p:sp>
-        <p:nvSpPr>
-          <p:cNvPr id="25" name="Shape 23"/>
-          <p:cNvSpPr/>
-          <p:nvPr/>
-        </p:nvSpPr>
-        <p:spPr>
-          <a:xfrm>
-            <a:off x="1901952" y="4873752"/>
-            <a:ext cx="118872" cy="118872"/>
-          </a:xfrm>
-          <a:prstGeom prst="ellipse">
-            <a:avLst/>
-          </a:prstGeom>
-          <a:solidFill>
-            <a:srgbClr val="235D91"/>
-          </a:solidFill>
-          <a:ln w="12700">
-            <a:solidFill>
-              <a:srgbClr val="235D91"/>
-            </a:solidFill>
-            <a:prstDash val="solid"/>
-          </a:ln>
-        </p:spPr>
-        <p:txBody>
-          <a:bodyPr/>
-          <a:lstStyle/>
-          <a:p>
-            <a:endParaRPr lang="en-JP"/>
-          </a:p>
-        </p:txBody>
-      </p:sp>
-      <p:sp>
-        <p:nvSpPr>
-          <p:cNvPr id="26" name="Shape 24"/>
-          <p:cNvSpPr/>
-          <p:nvPr/>
-        </p:nvSpPr>
-        <p:spPr>
-          <a:xfrm>
-            <a:off x="2167128" y="4690872"/>
-            <a:ext cx="118872" cy="118872"/>
-          </a:xfrm>
-          <a:prstGeom prst="ellipse">
-            <a:avLst/>
-          </a:prstGeom>
-          <a:solidFill>
-            <a:srgbClr val="235D91"/>
-          </a:solidFill>
-          <a:ln w="12700">
-            <a:solidFill>
-              <a:srgbClr val="235D91"/>
-            </a:solidFill>
-            <a:prstDash val="solid"/>
-          </a:ln>
-        </p:spPr>
-        <p:txBody>
-          <a:bodyPr/>
-          <a:lstStyle/>
-          <a:p>
-            <a:endParaRPr lang="en-JP"/>
-          </a:p>
-        </p:txBody>
-      </p:sp>
-      <p:sp>
-        <p:nvSpPr>
-          <p:cNvPr id="27" name="Shape 25"/>
-          <p:cNvSpPr/>
-          <p:nvPr/>
-        </p:nvSpPr>
-        <p:spPr>
-          <a:xfrm>
-            <a:off x="2432304" y="4507992"/>
-            <a:ext cx="118872" cy="118872"/>
-          </a:xfrm>
-          <a:prstGeom prst="ellipse">
-            <a:avLst/>
-          </a:prstGeom>
-          <a:solidFill>
-            <a:srgbClr val="235D91"/>
-          </a:solidFill>
-          <a:ln w="12700">
-            <a:solidFill>
-              <a:srgbClr val="235D91"/>
-            </a:solidFill>
-            <a:prstDash val="solid"/>
-          </a:ln>
-        </p:spPr>
-        <p:txBody>
-          <a:bodyPr/>
-          <a:lstStyle/>
-          <a:p>
-            <a:endParaRPr lang="en-JP"/>
-          </a:p>
-        </p:txBody>
-      </p:sp>
-      <p:sp>
-        <p:nvSpPr>
-          <p:cNvPr id="28" name="Shape 26"/>
-          <p:cNvSpPr/>
-          <p:nvPr/>
-        </p:nvSpPr>
-        <p:spPr>
-          <a:xfrm>
-            <a:off x="2697480" y="4325112"/>
-            <a:ext cx="118872" cy="118872"/>
-          </a:xfrm>
-          <a:prstGeom prst="ellipse">
-            <a:avLst/>
-          </a:prstGeom>
-          <a:solidFill>
-            <a:srgbClr val="235D91"/>
-          </a:solidFill>
-          <a:ln w="12700">
-            <a:solidFill>
-              <a:srgbClr val="235D91"/>
-            </a:solidFill>
-            <a:prstDash val="solid"/>
-          </a:ln>
-        </p:spPr>
-        <p:txBody>
-          <a:bodyPr/>
-          <a:lstStyle/>
-          <a:p>
-            <a:endParaRPr lang="en-JP"/>
-          </a:p>
-        </p:txBody>
-      </p:sp>
-      <p:sp>
-        <p:nvSpPr>
-          <p:cNvPr id="29" name="Shape 27"/>
-          <p:cNvSpPr/>
-          <p:nvPr/>
-        </p:nvSpPr>
-        <p:spPr>
-          <a:xfrm>
-            <a:off x="2962656" y="4142232"/>
-            <a:ext cx="118872" cy="118872"/>
-          </a:xfrm>
-          <a:prstGeom prst="ellipse">
-            <a:avLst/>
-          </a:prstGeom>
-          <a:solidFill>
-            <a:srgbClr val="235D91"/>
-          </a:solidFill>
-          <a:ln w="12700">
-            <a:solidFill>
-              <a:srgbClr val="235D91"/>
-            </a:solidFill>
-            <a:prstDash val="solid"/>
-          </a:ln>
-        </p:spPr>
-        <p:txBody>
-          <a:bodyPr/>
-          <a:lstStyle/>
-          <a:p>
-            <a:endParaRPr lang="en-JP"/>
-          </a:p>
-        </p:txBody>
-      </p:sp>
-      <p:sp>
-        <p:nvSpPr>
-          <p:cNvPr id="30" name="Shape 28"/>
-          <p:cNvSpPr/>
-          <p:nvPr/>
-        </p:nvSpPr>
-        <p:spPr>
-          <a:xfrm>
-            <a:off x="3227832" y="3959352"/>
-            <a:ext cx="118872" cy="118872"/>
-          </a:xfrm>
-          <a:prstGeom prst="ellipse">
-            <a:avLst/>
-          </a:prstGeom>
-          <a:solidFill>
-            <a:srgbClr val="235D91"/>
-          </a:solidFill>
-          <a:ln w="12700">
-            <a:solidFill>
-              <a:srgbClr val="235D91"/>
-            </a:solidFill>
-            <a:prstDash val="solid"/>
-          </a:ln>
-        </p:spPr>
-        <p:txBody>
-          <a:bodyPr/>
-          <a:lstStyle/>
-          <a:p>
-            <a:endParaRPr lang="en-JP"/>
-          </a:p>
-        </p:txBody>
-      </p:sp>
-      <p:sp>
-        <p:nvSpPr>
-          <p:cNvPr id="31" name="Shape 29"/>
-          <p:cNvSpPr/>
-          <p:nvPr/>
-        </p:nvSpPr>
-        <p:spPr>
-          <a:xfrm>
-            <a:off x="3493008" y="3776472"/>
-            <a:ext cx="118872" cy="118872"/>
-          </a:xfrm>
-          <a:prstGeom prst="ellipse">
-            <a:avLst/>
-          </a:prstGeom>
-          <a:solidFill>
-            <a:srgbClr val="235D91"/>
-          </a:solidFill>
-          <a:ln w="12700">
-            <a:solidFill>
-              <a:srgbClr val="235D91"/>
-            </a:solidFill>
-            <a:prstDash val="solid"/>
-          </a:ln>
-        </p:spPr>
-        <p:txBody>
-          <a:bodyPr/>
-          <a:lstStyle/>
-          <a:p>
-            <a:endParaRPr lang="en-JP"/>
-          </a:p>
-        </p:txBody>
-      </p:sp>
-      <p:sp>
-        <p:nvSpPr>
-          <p:cNvPr id="32" name="Shape 30"/>
-          <p:cNvSpPr/>
-          <p:nvPr/>
-        </p:nvSpPr>
-        <p:spPr>
-          <a:xfrm>
-            <a:off x="3758184" y="3593592"/>
-            <a:ext cx="118872" cy="118872"/>
-          </a:xfrm>
-          <a:prstGeom prst="ellipse">
-            <a:avLst/>
-          </a:prstGeom>
-          <a:solidFill>
-            <a:srgbClr val="235D91"/>
-          </a:solidFill>
-          <a:ln w="12700">
-            <a:solidFill>
-              <a:srgbClr val="235D91"/>
-            </a:solidFill>
-            <a:prstDash val="solid"/>
-          </a:ln>
-        </p:spPr>
-        <p:txBody>
-          <a:bodyPr/>
-          <a:lstStyle/>
-          <a:p>
-            <a:endParaRPr lang="en-JP"/>
-          </a:p>
-        </p:txBody>
-      </p:sp>
-      <p:sp>
-        <p:nvSpPr>
-          <p:cNvPr id="33" name="Shape 31"/>
-          <p:cNvSpPr/>
-          <p:nvPr/>
-        </p:nvSpPr>
-        <p:spPr>
-          <a:xfrm>
-            <a:off x="4023360" y="3410712"/>
-            <a:ext cx="118872" cy="118872"/>
-          </a:xfrm>
-          <a:prstGeom prst="ellipse">
-            <a:avLst/>
-          </a:prstGeom>
-          <a:solidFill>
-            <a:srgbClr val="235D91"/>
-          </a:solidFill>
-          <a:ln w="12700">
-            <a:solidFill>
-              <a:srgbClr val="235D91"/>
-            </a:solidFill>
-            <a:prstDash val="solid"/>
-          </a:ln>
-        </p:spPr>
-        <p:txBody>
-          <a:bodyPr/>
-          <a:lstStyle/>
-          <a:p>
-            <a:endParaRPr lang="en-JP"/>
-          </a:p>
-        </p:txBody>
-      </p:sp>
-      <p:sp>
-        <p:nvSpPr>
-          <p:cNvPr id="34" name="Shape 32"/>
-          <p:cNvSpPr/>
-          <p:nvPr/>
-        </p:nvSpPr>
-        <p:spPr>
-          <a:xfrm>
-            <a:off x="4288536" y="3227832"/>
-            <a:ext cx="118872" cy="118872"/>
-          </a:xfrm>
-          <a:prstGeom prst="ellipse">
-            <a:avLst/>
-          </a:prstGeom>
-          <a:solidFill>
-            <a:srgbClr val="235D91"/>
-          </a:solidFill>
-          <a:ln w="12700">
-            <a:solidFill>
-              <a:srgbClr val="235D91"/>
-            </a:solidFill>
-            <a:prstDash val="solid"/>
-          </a:ln>
-        </p:spPr>
-        <p:txBody>
-          <a:bodyPr/>
-          <a:lstStyle/>
-          <a:p>
-            <a:endParaRPr lang="en-JP"/>
-          </a:p>
-        </p:txBody>
-      </p:sp>
-      <p:sp>
-        <p:nvSpPr>
-          <p:cNvPr id="35" name="Shape 33"/>
-          <p:cNvSpPr/>
-          <p:nvPr/>
-        </p:nvSpPr>
-        <p:spPr>
-          <a:xfrm>
-            <a:off x="4553712" y="3044952"/>
-            <a:ext cx="118872" cy="118872"/>
-          </a:xfrm>
-          <a:prstGeom prst="ellipse">
-            <a:avLst/>
-          </a:prstGeom>
-          <a:solidFill>
-            <a:srgbClr val="235D91"/>
-          </a:solidFill>
-          <a:ln w="12700">
-            <a:solidFill>
-              <a:srgbClr val="235D91"/>
-            </a:solidFill>
-            <a:prstDash val="solid"/>
-          </a:ln>
-        </p:spPr>
-        <p:txBody>
-          <a:bodyPr/>
-          <a:lstStyle/>
-          <a:p>
-            <a:endParaRPr lang="en-JP"/>
-          </a:p>
-        </p:txBody>
-      </p:sp>
-      <p:sp>
-        <p:nvSpPr>
-          <p:cNvPr id="36" name="Shape 34"/>
-          <p:cNvSpPr/>
-          <p:nvPr/>
-        </p:nvSpPr>
-        <p:spPr>
-          <a:xfrm>
-            <a:off x="1261872" y="5285232"/>
-            <a:ext cx="3986784" cy="0"/>
-          </a:xfrm>
-          <a:prstGeom prst="line">
-            <a:avLst/>
-          </a:prstGeom>
-          <a:noFill/>
-          <a:ln w="30480">
-            <a:solidFill>
-              <a:srgbClr val="235D91"/>
-            </a:solidFill>
-            <a:prstDash val="solid"/>
-            <a:tailEnd type="triangle"/>
-          </a:ln>
-        </p:spPr>
-        <p:txBody>
-          <a:bodyPr/>
-          <a:lstStyle/>
-          <a:p>
-            <a:endParaRPr lang="en-JP"/>
-          </a:p>
-        </p:txBody>
-      </p:sp>
-      <p:sp>
-        <p:nvSpPr>
-          <p:cNvPr id="37" name="Text 35"/>
-          <p:cNvSpPr/>
-          <p:nvPr/>
-        </p:nvSpPr>
-        <p:spPr>
-          <a:xfrm>
-            <a:off x="5193792" y="1856232"/>
-            <a:ext cx="822960" cy="310896"/>
-          </a:xfrm>
-          <a:prstGeom prst="rect">
-            <a:avLst/>
-          </a:prstGeom>
-          <a:noFill/>
-          <a:ln/>
-        </p:spPr>
-        <p:txBody>
-          <a:bodyPr wrap="square" lIns="445" tIns="445" rIns="445" bIns="445" rtlCol="0" anchor="ctr"/>
-          <a:lstStyle/>
-          <a:p>
-            <a:pPr marL="0" indent="0">
-              <a:buNone/>
-            </a:pPr>
-            <a:r>
-              <a:rPr lang="en-US" sz="1900" b="1" dirty="0">
-                <a:solidFill>
-                  <a:srgbClr val="235D91"/>
-                </a:solidFill>
-                <a:latin typeface="Aptos" pitchFamily="34" charset="0"/>
-                <a:ea typeface="Aptos" pitchFamily="34" charset="-122"/>
-                <a:cs typeface="Aptos" pitchFamily="34" charset="-120"/>
-              </a:rPr>
-              <a:t>PC1</a:t>
-            </a:r>
-            <a:endParaRPr lang="en-US" sz="1900" dirty="0"/>
-          </a:p>
-        </p:txBody>
-      </p:sp>
-      <p:sp>
-        <p:nvSpPr>
-          <p:cNvPr id="38" name="Shape 36"/>
-          <p:cNvSpPr/>
-          <p:nvPr/>
-        </p:nvSpPr>
-        <p:spPr>
-          <a:xfrm>
-            <a:off x="6400800" y="1947672"/>
-            <a:ext cx="5010912" cy="2651760"/>
-          </a:xfrm>
-          <a:prstGeom prst="roundRect">
-            <a:avLst>
-              <a:gd name="adj" fmla="val 4138"/>
-            </a:avLst>
-          </a:prstGeom>
-          <a:solidFill>
-            <a:srgbClr val="E9F1F8"/>
-          </a:solidFill>
-          <a:ln w="12700">
-            <a:solidFill>
-              <a:srgbClr val="E9F1F8"/>
-            </a:solidFill>
-            <a:prstDash val="solid"/>
-          </a:ln>
-        </p:spPr>
-        <p:txBody>
-          <a:bodyPr/>
-          <a:lstStyle/>
-          <a:p>
-            <a:endParaRPr lang="en-JP"/>
-          </a:p>
-        </p:txBody>
-      </p:sp>
-      <p:sp>
-        <p:nvSpPr>
-          <p:cNvPr id="39" name="Text 37"/>
-          <p:cNvSpPr/>
-          <p:nvPr/>
-        </p:nvSpPr>
-        <p:spPr>
-          <a:xfrm>
-            <a:off x="6629400" y="2148840"/>
-            <a:ext cx="4544568" cy="539496"/>
-          </a:xfrm>
-          <a:prstGeom prst="rect">
-            <a:avLst/>
-          </a:prstGeom>
-          <a:noFill/>
-          <a:ln/>
-        </p:spPr>
-        <p:txBody>
-          <a:bodyPr wrap="square" lIns="445" tIns="445" rIns="445" bIns="445" rtlCol="0" anchor="ctr"/>
-          <a:lstStyle/>
-          <a:p>
-            <a:pPr marL="0" indent="0">
-              <a:buNone/>
-            </a:pPr>
-            <a:r>
-              <a:rPr lang="en-US" sz="2000" b="1" dirty="0">
-                <a:solidFill>
-                  <a:srgbClr val="18314C"/>
-                </a:solidFill>
-                <a:latin typeface="Aptos" pitchFamily="34" charset="0"/>
-                <a:ea typeface="Aptos" pitchFamily="34" charset="-122"/>
-                <a:cs typeface="Aptos" pitchFamily="34" charset="-120"/>
-              </a:rPr>
-              <a:t>PC1: direction of largest variance</a:t>
-            </a:r>
-            <a:endParaRPr lang="en-US" sz="2000" dirty="0"/>
-          </a:p>
-        </p:txBody>
-      </p:sp>
-      <p:sp>
-        <p:nvSpPr>
-          <p:cNvPr id="40" name="Text 38"/>
-          <p:cNvSpPr/>
-          <p:nvPr/>
-        </p:nvSpPr>
-        <p:spPr>
-          <a:xfrm>
-            <a:off x="6629400" y="2770632"/>
-            <a:ext cx="4526280" cy="393192"/>
-          </a:xfrm>
-          <a:prstGeom prst="rect">
-            <a:avLst/>
-          </a:prstGeom>
-          <a:noFill/>
-          <a:ln/>
-        </p:spPr>
-        <p:txBody>
-          <a:bodyPr wrap="square" lIns="445" tIns="445" rIns="445" bIns="445" rtlCol="0" anchor="ctr"/>
-          <a:lstStyle/>
-          <a:p>
-            <a:pPr marL="0" indent="0">
-              <a:buNone/>
-            </a:pPr>
-            <a:r>
-              <a:rPr lang="en-US" sz="1500" dirty="0">
-                <a:solidFill>
-                  <a:srgbClr val="50677D"/>
-                </a:solidFill>
-                <a:latin typeface="Noto Sans CJK JP" pitchFamily="34" charset="0"/>
-                <a:ea typeface="Noto Sans CJK JP" pitchFamily="34" charset="-122"/>
-                <a:cs typeface="Noto Sans CJK JP" pitchFamily="34" charset="-120"/>
-              </a:rPr>
-              <a:t>第１主成分：分散が最大の方向</a:t>
-            </a:r>
-            <a:endParaRPr lang="en-US" sz="1500" dirty="0"/>
-          </a:p>
-        </p:txBody>
-      </p:sp>
-      <p:sp>
-        <p:nvSpPr>
-          <p:cNvPr id="41" name="Text 39"/>
-          <p:cNvSpPr/>
-          <p:nvPr/>
-        </p:nvSpPr>
-        <p:spPr>
-          <a:xfrm>
-            <a:off x="6629400" y="3328416"/>
-            <a:ext cx="4526280" cy="585216"/>
-          </a:xfrm>
-          <a:prstGeom prst="rect">
-            <a:avLst/>
-          </a:prstGeom>
-          <a:noFill/>
-          <a:ln/>
-        </p:spPr>
-        <p:txBody>
-          <a:bodyPr wrap="square" lIns="445" tIns="445" rIns="445" bIns="445" rtlCol="0" anchor="ctr"/>
-          <a:lstStyle/>
-          <a:p>
-            <a:pPr marL="0" indent="0">
-              <a:buNone/>
-            </a:pPr>
-            <a:r>
-              <a:rPr lang="en-US" sz="1800" dirty="0">
-                <a:solidFill>
-                  <a:srgbClr val="18314C"/>
-                </a:solidFill>
-                <a:latin typeface="Aptos" pitchFamily="34" charset="0"/>
-                <a:ea typeface="Aptos" pitchFamily="34" charset="-122"/>
-                <a:cs typeface="Aptos" pitchFamily="34" charset="-120"/>
-              </a:rPr>
-              <a:t>PC2: next direction, orthogonal to PC1</a:t>
-            </a:r>
-            <a:endParaRPr lang="en-US" sz="1800" dirty="0"/>
-          </a:p>
-        </p:txBody>
-      </p:sp>
-      <p:sp>
-        <p:nvSpPr>
-          <p:cNvPr id="42" name="Text 40"/>
-          <p:cNvSpPr/>
-          <p:nvPr/>
-        </p:nvSpPr>
-        <p:spPr>
-          <a:xfrm>
-            <a:off x="6629400" y="3977640"/>
-            <a:ext cx="4535424" cy="338328"/>
-          </a:xfrm>
-          <a:prstGeom prst="rect">
-            <a:avLst/>
-          </a:prstGeom>
-          <a:noFill/>
-          <a:ln/>
-        </p:spPr>
-        <p:txBody>
-          <a:bodyPr wrap="square" lIns="445" tIns="445" rIns="445" bIns="445" rtlCol="0" anchor="ctr"/>
-          <a:lstStyle/>
-          <a:p>
-            <a:pPr marL="0" indent="0">
-              <a:buNone/>
-            </a:pPr>
-            <a:r>
-              <a:rPr lang="en-US" sz="1400" dirty="0">
-                <a:solidFill>
-                  <a:srgbClr val="50677D"/>
-                </a:solidFill>
-                <a:latin typeface="Noto Sans CJK JP" pitchFamily="34" charset="0"/>
-                <a:ea typeface="Noto Sans CJK JP" pitchFamily="34" charset="-122"/>
-                <a:cs typeface="Noto Sans CJK JP" pitchFamily="34" charset="-120"/>
-              </a:rPr>
-              <a:t>第２主成分：PC1に直交する次の方向</a:t>
-            </a:r>
-            <a:endParaRPr lang="en-US" sz="1400" dirty="0"/>
-          </a:p>
-        </p:txBody>
-      </p:sp>
-      <p:sp>
-        <p:nvSpPr>
-          <p:cNvPr id="43" name="Shape 41"/>
-          <p:cNvSpPr/>
-          <p:nvPr/>
-        </p:nvSpPr>
-        <p:spPr>
-          <a:xfrm>
-            <a:off x="667512" y="5742432"/>
-            <a:ext cx="10881360" cy="658368"/>
-          </a:xfrm>
-          <a:prstGeom prst="roundRect">
-            <a:avLst>
-              <a:gd name="adj" fmla="val 16667"/>
-            </a:avLst>
-          </a:prstGeom>
-          <a:solidFill>
-            <a:srgbClr val="E2F3EF"/>
-          </a:solidFill>
-          <a:ln w="12700">
-            <a:solidFill>
-              <a:srgbClr val="E2F3EF"/>
-            </a:solidFill>
-            <a:prstDash val="solid"/>
-          </a:ln>
-        </p:spPr>
-        <p:txBody>
-          <a:bodyPr/>
-          <a:lstStyle/>
-          <a:p>
-            <a:endParaRPr lang="en-JP"/>
-          </a:p>
-        </p:txBody>
-      </p:sp>
-      <p:sp>
-        <p:nvSpPr>
-          <p:cNvPr id="44" name="Text 42"/>
-          <p:cNvSpPr/>
-          <p:nvPr/>
-        </p:nvSpPr>
-        <p:spPr>
-          <a:xfrm>
-            <a:off x="859536" y="5815584"/>
-            <a:ext cx="10469880" cy="256032"/>
-          </a:xfrm>
-          <a:prstGeom prst="rect">
-            <a:avLst/>
-          </a:prstGeom>
-          <a:noFill/>
-          <a:ln/>
-        </p:spPr>
-        <p:txBody>
-          <a:bodyPr wrap="square" lIns="445" tIns="445" rIns="445" bIns="445" rtlCol="0" anchor="ctr"/>
-          <a:lstStyle/>
-          <a:p>
-            <a:pPr marL="0" indent="0">
-              <a:buNone/>
-            </a:pPr>
-            <a:r>
-              <a:rPr lang="en-US" sz="1600" b="1" dirty="0">
-                <a:solidFill>
-                  <a:srgbClr val="18314C"/>
-                </a:solidFill>
-                <a:latin typeface="Aptos" pitchFamily="34" charset="0"/>
-                <a:ea typeface="Aptos" pitchFamily="34" charset="-122"/>
-                <a:cs typeface="Aptos" pitchFamily="34" charset="-120"/>
-              </a:rPr>
-              <a:t>PCA changes coordinates; it does not magically invent new pixel information.</a:t>
-            </a:r>
-            <a:endParaRPr lang="en-US" sz="1600" dirty="0"/>
-          </a:p>
-        </p:txBody>
-      </p:sp>
-      <p:sp>
-        <p:nvSpPr>
-          <p:cNvPr id="45" name="Text 43"/>
-          <p:cNvSpPr/>
-          <p:nvPr/>
-        </p:nvSpPr>
-        <p:spPr>
-          <a:xfrm>
-            <a:off x="859536" y="6108192"/>
-            <a:ext cx="10469880" cy="201168"/>
-          </a:xfrm>
-          <a:prstGeom prst="rect">
-            <a:avLst/>
-          </a:prstGeom>
-          <a:noFill/>
-          <a:ln/>
-        </p:spPr>
-        <p:txBody>
-          <a:bodyPr wrap="square" lIns="445" tIns="445" rIns="445" bIns="445" rtlCol="0" anchor="ctr"/>
-          <a:lstStyle/>
-          <a:p>
-            <a:pPr marL="0" indent="0">
-              <a:buNone/>
-            </a:pPr>
-            <a:r>
-              <a:rPr lang="en-US" sz="1250" dirty="0">
-                <a:solidFill>
-                  <a:srgbClr val="50677D"/>
-                </a:solidFill>
-                <a:latin typeface="Noto Sans CJK JP" pitchFamily="34" charset="0"/>
-                <a:ea typeface="Noto Sans CJK JP" pitchFamily="34" charset="-122"/>
-                <a:cs typeface="Noto Sans CJK JP" pitchFamily="34" charset="-120"/>
-              </a:rPr>
-              <a:t>PCAは座標の表し方を変えます。元の画素情報を新しく作り出すわけではありません。</a:t>
-            </a:r>
-            <a:endParaRPr lang="en-US" sz="1250" dirty="0"/>
           </a:p>
         </p:txBody>
       </p:sp>
@@ -35386,30 +36066,6 @@
           </a:p>
         </p:txBody>
       </p:sp>
-      <p:pic>
-        <p:nvPicPr>
-          <p:cNvPr id="9" name="Image 0" descr="/mnt/data/yale_faces.png"/>
-          <p:cNvPicPr>
-            <a:picLocks noChangeAspect="1"/>
-          </p:cNvPicPr>
-          <p:nvPr/>
-        </p:nvPicPr>
-        <p:blipFill>
-          <a:blip r:embed="rId3"/>
-          <a:stretch>
-            <a:fillRect/>
-          </a:stretch>
-        </p:blipFill>
-        <p:spPr>
-          <a:xfrm>
-            <a:off x="694944" y="1490472"/>
-            <a:ext cx="7818120" cy="4233672"/>
-          </a:xfrm>
-          <a:prstGeom prst="rect">
-            <a:avLst/>
-          </a:prstGeom>
-        </p:spPr>
-      </p:pic>
       <p:sp>
         <p:nvSpPr>
           <p:cNvPr id="10" name="Text 7"/>
@@ -35678,6 +36334,36 @@
           </a:p>
         </p:txBody>
       </p:sp>
+      <p:pic>
+        <p:nvPicPr>
+          <p:cNvPr id="17" name="Picture 16">
+            <a:extLst>
+              <a:ext uri="{FF2B5EF4-FFF2-40B4-BE49-F238E27FC236}">
+                <a16:creationId xmlns:a16="http://schemas.microsoft.com/office/drawing/2014/main" id="{EABA2B95-E07F-1D02-CD84-6FB7DE0EF4A2}"/>
+              </a:ext>
+            </a:extLst>
+          </p:cNvPr>
+          <p:cNvPicPr>
+            <a:picLocks noChangeAspect="1"/>
+          </p:cNvPicPr>
+          <p:nvPr/>
+        </p:nvPicPr>
+        <p:blipFill>
+          <a:blip r:embed="rId3"/>
+          <a:stretch>
+            <a:fillRect/>
+          </a:stretch>
+        </p:blipFill>
+        <p:spPr>
+          <a:xfrm>
+            <a:off x="633984" y="1385180"/>
+            <a:ext cx="7856674" cy="4179082"/>
+          </a:xfrm>
+          <a:prstGeom prst="rect">
+            <a:avLst/>
+          </a:prstGeom>
+        </p:spPr>
+      </p:pic>
     </p:spTree>
   </p:cSld>
   <p:clrMapOvr>
